--- a/pitch/Selly-Pitch.pptx
+++ b/pitch/Selly-Pitch.pptx
@@ -4,6 +4,9 @@
   <p:sldMasterIdLst>
     <p:sldMasterId id="2147483648" r:id="rId1"/>
   </p:sldMasterIdLst>
+  <p:notesMasterIdLst>
+    <p:notesMasterId r:id="rId8"/>
+  </p:notesMasterIdLst>
   <p:sldIdLst>
     <p:sldId id="256" r:id="rId2"/>
     <p:sldId id="257" r:id="rId3"/>
@@ -12,9 +15,6 @@
     <p:sldId id="260" r:id="rId6"/>
     <p:sldId id="261" r:id="rId7"/>
   </p:sldIdLst>
-  <p:notesMasterIdLst>
-    <p:notesMasterId r:id="rId8"/>
-  </p:notesMasterIdLst>
   <p:sldSz cx="12192000" cy="6858000"/>
   <p:notesSz cx="6858000" cy="12192000"/>
   <p:defaultTextStyle>
@@ -109,6 +109,11 @@
       </a:defRPr>
     </a:lvl9pPr>
   </p:defaultTextStyle>
+  <p:extLst>
+    <p:ext uri="{EFAFB233-063F-42B5-8137-9DF3F51BA10A}">
+      <p15:sldGuideLst xmlns:p15="http://schemas.microsoft.com/office/powerpoint/2012/main"/>
+    </p:ext>
+  </p:extLst>
 </p:presentation>
 </file>
 
@@ -134,234 +139,10 @@
           <a:chExt cx="0" cy="0"/>
         </a:xfrm>
       </p:grpSpPr>
-      <p:sp>
-        <p:nvSpPr>
-          <p:cNvPr id="2" name="Header Placeholder 1"/>
-          <p:cNvSpPr>
-            <a:spLocks noGrp="1"/>
-          </p:cNvSpPr>
-          <p:nvPr>
-            <p:ph type="hdr" sz="quarter"/>
-          </p:nvPr>
-        </p:nvSpPr>
-        <p:spPr>
-          <a:xfrm>
-            <a:off x="0" y="0"/>
-            <a:ext cx="2971800" cy="458788"/>
-          </a:xfrm>
-          <a:prstGeom prst="rect">
-            <a:avLst/>
-          </a:prstGeom>
-        </p:spPr>
-        <p:txBody>
-          <a:bodyPr vert="horz" lIns="91440" tIns="45720" rIns="91440" bIns="45720" rtlCol="0"/>
-          <a:lstStyle>
-            <a:lvl1pPr algn="l">
-              <a:defRPr sz="1200"/>
-            </a:lvl1pPr>
-          </a:lstStyle>
-          <a:p>
-            <a:endParaRPr lang="en-US"/>
-          </a:p>
-        </p:txBody>
-      </p:sp>
-      <p:sp>
-        <p:nvSpPr>
-          <p:cNvPr id="3" name="Date Placeholder 2"/>
-          <p:cNvSpPr>
-            <a:spLocks noGrp="1"/>
-          </p:cNvSpPr>
-          <p:nvPr>
-            <p:ph type="dt" idx="1"/>
-          </p:nvPr>
-        </p:nvSpPr>
-        <p:spPr>
-          <a:xfrm>
-            <a:off x="3884613" y="0"/>
-            <a:ext cx="2971800" cy="458788"/>
-          </a:xfrm>
-          <a:prstGeom prst="rect">
-            <a:avLst/>
-          </a:prstGeom>
-        </p:spPr>
-        <p:txBody>
-          <a:bodyPr vert="horz" lIns="91440" tIns="45720" rIns="91440" bIns="45720" rtlCol="0"/>
-          <a:lstStyle>
-            <a:lvl1pPr algn="r">
-              <a:defRPr sz="1200"/>
-            </a:lvl1pPr>
-          </a:lstStyle>
-          <a:p>
-            <a:fld id="{5282F153-3F37-0F45-9E97-73ACFA13230C}" type="datetimeFigureOut">
-              <a:rPr lang="en-US"/>
-              <a:t>7/23/19</a:t>
-            </a:fld>
-            <a:endParaRPr lang="en-US"/>
-          </a:p>
-        </p:txBody>
-      </p:sp>
-      <p:sp>
-        <p:nvSpPr>
-          <p:cNvPr id="4" name="Slide Image Placeholder 3"/>
-          <p:cNvSpPr>
-            <a:spLocks noGrp="1" noRot="1" noChangeAspect="1"/>
-          </p:cNvSpPr>
-          <p:nvPr>
-            <p:ph type="sldImg" idx="2"/>
-          </p:nvPr>
-        </p:nvSpPr>
-        <p:spPr>
-          <a:xfrm>
-            <a:off x="685800" y="1143000"/>
-            <a:ext cx="5486400" cy="3086100"/>
-          </a:xfrm>
-          <a:prstGeom prst="rect">
-            <a:avLst/>
-          </a:prstGeom>
-          <a:noFill/>
-          <a:ln w="12700">
-            <a:solidFill>
-              <a:prstClr val="black"/>
-            </a:solidFill>
-          </a:ln>
-        </p:spPr>
-        <p:txBody>
-          <a:bodyPr vert="horz" lIns="91440" tIns="45720" rIns="91440" bIns="45720" rtlCol="0" anchor="ctr"/>
-          <a:lstStyle/>
-          <a:p>
-            <a:endParaRPr lang="en-US"/>
-          </a:p>
-        </p:txBody>
-      </p:sp>
-      <p:sp>
-        <p:nvSpPr>
-          <p:cNvPr id="5" name="Notes Placeholder 4"/>
-          <p:cNvSpPr>
-            <a:spLocks noGrp="1"/>
-          </p:cNvSpPr>
-          <p:nvPr>
-            <p:ph type="body" sz="quarter" idx="3"/>
-          </p:nvPr>
-        </p:nvSpPr>
-        <p:spPr>
-          <a:xfrm>
-            <a:off x="685800" y="4400550"/>
-            <a:ext cx="5486400" cy="3600450"/>
-          </a:xfrm>
-          <a:prstGeom prst="rect">
-            <a:avLst/>
-          </a:prstGeom>
-        </p:spPr>
-        <p:txBody>
-          <a:bodyPr vert="horz" lIns="91440" tIns="45720" rIns="91440" bIns="45720" rtlCol="0"/>
-          <a:lstStyle/>
-          <a:p>
-            <a:pPr lvl="0"/>
-            <a:r>
-              <a:rPr lang="en-US"/>
-              <a:t>Click to edit Master text styles</a:t>
-            </a:r>
-          </a:p>
-          <a:p>
-            <a:pPr lvl="1"/>
-            <a:r>
-              <a:rPr lang="en-US"/>
-              <a:t>Second level</a:t>
-            </a:r>
-          </a:p>
-          <a:p>
-            <a:pPr lvl="2"/>
-            <a:r>
-              <a:rPr lang="en-US"/>
-              <a:t>Third level</a:t>
-            </a:r>
-          </a:p>
-          <a:p>
-            <a:pPr lvl="3"/>
-            <a:r>
-              <a:rPr lang="en-US"/>
-              <a:t>Fourth level</a:t>
-            </a:r>
-          </a:p>
-          <a:p>
-            <a:pPr lvl="4"/>
-            <a:r>
-              <a:rPr lang="en-US"/>
-              <a:t>Fifth level</a:t>
-            </a:r>
-          </a:p>
-        </p:txBody>
-      </p:sp>
-      <p:sp>
-        <p:nvSpPr>
-          <p:cNvPr id="6" name="Footer Placeholder 5"/>
-          <p:cNvSpPr>
-            <a:spLocks noGrp="1"/>
-          </p:cNvSpPr>
-          <p:nvPr>
-            <p:ph type="ftr" sz="quarter" idx="4"/>
-          </p:nvPr>
-        </p:nvSpPr>
-        <p:spPr>
-          <a:xfrm>
-            <a:off x="0" y="8685213"/>
-            <a:ext cx="2971800" cy="458787"/>
-          </a:xfrm>
-          <a:prstGeom prst="rect">
-            <a:avLst/>
-          </a:prstGeom>
-        </p:spPr>
-        <p:txBody>
-          <a:bodyPr vert="horz" lIns="91440" tIns="45720" rIns="91440" bIns="45720" rtlCol="0" anchor="b"/>
-          <a:lstStyle>
-            <a:lvl1pPr algn="l">
-              <a:defRPr sz="1200"/>
-            </a:lvl1pPr>
-          </a:lstStyle>
-          <a:p>
-            <a:endParaRPr lang="en-US"/>
-          </a:p>
-        </p:txBody>
-      </p:sp>
-      <p:sp>
-        <p:nvSpPr>
-          <p:cNvPr id="7" name="Slide Number Placeholder 6"/>
-          <p:cNvSpPr>
-            <a:spLocks noGrp="1"/>
-          </p:cNvSpPr>
-          <p:nvPr>
-            <p:ph type="sldNum" sz="quarter" idx="5"/>
-          </p:nvPr>
-        </p:nvSpPr>
-        <p:spPr>
-          <a:xfrm>
-            <a:off x="3884613" y="8685213"/>
-            <a:ext cx="2971800" cy="458787"/>
-          </a:xfrm>
-          <a:prstGeom prst="rect">
-            <a:avLst/>
-          </a:prstGeom>
-        </p:spPr>
-        <p:txBody>
-          <a:bodyPr vert="horz" lIns="91440" tIns="45720" rIns="91440" bIns="45720" rtlCol="0" anchor="b"/>
-          <a:lstStyle>
-            <a:lvl1pPr algn="r">
-              <a:defRPr sz="1200"/>
-            </a:lvl1pPr>
-          </a:lstStyle>
-          <a:p>
-            <a:fld id="{CE5E9CC1-C706-0F49-92D6-E571CC5EEA8F}" type="slidenum">
-              <a:rPr lang="en-US"/>
-              <a:t>‹#›</a:t>
-            </a:fld>
-            <a:endParaRPr lang="en-US"/>
-          </a:p>
-        </p:txBody>
-      </p:sp>
     </p:spTree>
     <p:extLst>
       <p:ext uri="{BB962C8B-B14F-4D97-AF65-F5344CB8AC3E}">
-        <p14:creationId xmlns:p14="http://schemas.microsoft.com/office/powerpoint/2010/main" val="1024086991"/>
+        <p14:creationId xmlns:p14="http://schemas.microsoft.com/office/powerpoint/2010/main" val="2192308739"/>
       </p:ext>
     </p:extLst>
   </p:cSld>
@@ -509,7 +290,6 @@
               <a:rPr lang="en-US" dirty="0"/>
               <a:t>Selly turns a WhatsApp number into a working shop. We start with cloud kitchens because their pain is sharpest, but the idea is bigger: any household with a skill should be able to sell without building anything first.</a:t>
             </a:r>
-            <a:endParaRPr lang="en-US" dirty="0"/>
           </a:p>
         </p:txBody>
       </p:sp>
@@ -597,7 +377,6 @@
               <a:rPr lang="en-US" dirty="0"/>
               <a:t>The commission is the headline, but the deeper problem is ownership. A kitchen on an aggregator is renting demand it can never keep.</a:t>
             </a:r>
-            <a:endParaRPr lang="en-US" dirty="0"/>
           </a:p>
         </p:txBody>
       </p:sp>
@@ -685,7 +464,6 @@
               <a:rPr lang="en-US" dirty="0"/>
               <a:t>The customer side is a WhatsApp thread. The kitchen side is an app showing live orders, a batch view of what to cook, and one tap to move an order forward — which messages the customer automatically.</a:t>
             </a:r>
-            <a:endParaRPr lang="en-US" dirty="0"/>
           </a:p>
         </p:txBody>
       </p:sp>
@@ -773,7 +551,6 @@
               <a:rPr lang="en-US" dirty="0"/>
               <a:t>Someone who cooks, sews or teaches at home has everything except a way to take orders. The same product serves all of them with different words on the screen.</a:t>
             </a:r>
-            <a:endParaRPr lang="en-US" dirty="0"/>
           </a:p>
         </p:txBody>
       </p:sp>
@@ -861,7 +638,6 @@
               <a:rPr lang="en-US" dirty="0"/>
               <a:t>Rank these honestly: the suggestions and the referrals are worth more to us right now than the cheque.</a:t>
             </a:r>
-            <a:endParaRPr lang="en-US" dirty="0"/>
           </a:p>
         </p:txBody>
       </p:sp>
@@ -949,7 +725,6 @@
               <a:rPr lang="en-US" dirty="0"/>
               <a:t>Close by offering a live walkthrough on their own phone — the demo works end to end today.</a:t>
             </a:r>
-            <a:endParaRPr lang="en-US" dirty="0"/>
           </a:p>
         </p:txBody>
       </p:sp>
@@ -1022,6 +797,11 @@
 <file path=ppt/slideMasters/slideMaster1.xml><?xml version="1.0" encoding="utf-8"?>
 <p:sldMaster xmlns:a="http://schemas.openxmlformats.org/drawingml/2006/main" xmlns:r="http://schemas.openxmlformats.org/officeDocument/2006/relationships" xmlns:p="http://schemas.openxmlformats.org/presentationml/2006/main">
   <p:cSld>
+    <p:bg>
+      <p:bgRef idx="1001">
+        <a:schemeClr val="bg1"/>
+      </p:bgRef>
+    </p:bg>
     <p:spTree>
       <p:nvGrpSpPr>
         <p:cNvPr id="1" name=""/>
@@ -1304,6 +1084,7 @@
         <a:solidFill>
           <a:srgbClr val="0A0A12"/>
         </a:solidFill>
+        <a:effectLst/>
       </p:bgPr>
     </p:bg>
     <p:spTree>
@@ -1341,11 +1122,11 @@
           <a:bodyPr wrap="square" lIns="0" tIns="0" rIns="0" bIns="0" rtlCol="0" anchor="ctr"/>
           <a:lstStyle/>
           <a:p>
-            <a:pPr indent="0" marL="0">
+            <a:pPr marL="0" indent="0">
               <a:buNone/>
             </a:pPr>
             <a:r>
-              <a:rPr lang="en-US" sz="4000" b="1" spc="-100" kern="0" dirty="0">
+              <a:rPr lang="en-US" sz="4000" b="1" kern="0" spc="-100" dirty="0">
                 <a:solidFill>
                   <a:srgbClr val="F2F2F7"/>
                 </a:solidFill>
@@ -1355,11 +1136,8 @@
               </a:rPr>
               <a:t>selly</a:t>
             </a:r>
-            <a:pPr indent="0" marL="0">
-              <a:buNone/>
-            </a:pPr>
-            <a:r>
-              <a:rPr lang="en-US" sz="4000" b="1" spc="-100" kern="0" dirty="0">
+            <a:r>
+              <a:rPr lang="en-US" sz="4000" b="1" kern="0" spc="-100" dirty="0">
                 <a:solidFill>
                   <a:srgbClr val="25D366"/>
                 </a:solidFill>
@@ -1394,7 +1172,7 @@
           <a:bodyPr wrap="square" lIns="0" tIns="0" rIns="0" bIns="0" rtlCol="0" anchor="ctr"/>
           <a:lstStyle/>
           <a:p>
-            <a:pPr indent="0" marL="0">
+            <a:pPr marL="0" indent="0">
               <a:lnSpc>
                 <a:spcPts val="4600"/>
               </a:lnSpc>
@@ -1414,7 +1192,7 @@
             <a:endParaRPr lang="en-US" sz="4000" dirty="0"/>
           </a:p>
           <a:p>
-            <a:pPr indent="0" marL="0">
+            <a:pPr marL="0" indent="0">
               <a:lnSpc>
                 <a:spcPts val="4600"/>
               </a:lnSpc>
@@ -1456,7 +1234,7 @@
           <a:bodyPr wrap="square" lIns="0" tIns="0" rIns="0" bIns="0" rtlCol="0" anchor="ctr"/>
           <a:lstStyle/>
           <a:p>
-            <a:pPr indent="0" marL="0">
+            <a:pPr marL="0" indent="0">
               <a:buNone/>
             </a:pPr>
             <a:r>
@@ -1495,7 +1273,7 @@
           <a:bodyPr wrap="square" lIns="0" tIns="0" rIns="0" bIns="0" rtlCol="0" anchor="ctr"/>
           <a:lstStyle/>
           <a:p>
-            <a:pPr indent="0" marL="0">
+            <a:pPr marL="0" indent="0">
               <a:lnSpc>
                 <a:spcPts val="2200"/>
               </a:lnSpc>
@@ -1537,7 +1315,7 @@
           <a:bodyPr wrap="square" lIns="0" tIns="0" rIns="0" bIns="0" rtlCol="0" anchor="ctr"/>
           <a:lstStyle/>
           <a:p>
-            <a:pPr indent="0" marL="0">
+            <a:pPr marL="0" indent="0">
               <a:buNone/>
             </a:pPr>
             <a:r>
@@ -1603,7 +1381,7 @@
           <a:bodyPr wrap="square" lIns="0" tIns="0" rIns="0" bIns="0" rtlCol="0" anchor="ctr"/>
           <a:lstStyle/>
           <a:p>
-            <a:pPr indent="0" marL="0">
+            <a:pPr marL="0" indent="0">
               <a:lnSpc>
                 <a:spcPts val="1500"/>
               </a:lnSpc>
@@ -1672,7 +1450,7 @@
           <a:bodyPr wrap="square" lIns="0" tIns="0" rIns="0" bIns="0" rtlCol="0" anchor="ctr"/>
           <a:lstStyle/>
           <a:p>
-            <a:pPr indent="0" marL="0">
+            <a:pPr marL="0" indent="0">
               <a:lnSpc>
                 <a:spcPts val="1500"/>
               </a:lnSpc>
@@ -1741,7 +1519,7 @@
           <a:bodyPr wrap="square" lIns="0" tIns="0" rIns="0" bIns="0" rtlCol="0" anchor="ctr"/>
           <a:lstStyle/>
           <a:p>
-            <a:pPr indent="0" marL="0">
+            <a:pPr marL="0" indent="0">
               <a:lnSpc>
                 <a:spcPts val="1500"/>
               </a:lnSpc>
@@ -1761,7 +1539,7 @@
             <a:endParaRPr lang="en-US" sz="1200" dirty="0"/>
           </a:p>
           <a:p>
-            <a:pPr indent="0" marL="0">
+            <a:pPr marL="0" indent="0">
               <a:lnSpc>
                 <a:spcPts val="1500"/>
               </a:lnSpc>
@@ -1798,6 +1576,7 @@
         <a:solidFill>
           <a:srgbClr val="0A0A12"/>
         </a:solidFill>
+        <a:effectLst/>
       </p:bgPr>
     </p:bg>
     <p:spTree>
@@ -1835,7 +1614,7 @@
           <a:bodyPr wrap="square" lIns="0" tIns="0" rIns="0" bIns="0" rtlCol="0" anchor="ctr"/>
           <a:lstStyle/>
           <a:p>
-            <a:pPr indent="0" marL="0">
+            <a:pPr marL="0" indent="0">
               <a:buNone/>
             </a:pPr>
             <a:r>
@@ -1874,7 +1653,7 @@
           <a:bodyPr wrap="square" lIns="0" tIns="0" rIns="0" bIns="0" rtlCol="0" anchor="ctr"/>
           <a:lstStyle/>
           <a:p>
-            <a:pPr indent="0" marL="0">
+            <a:pPr marL="0" indent="0">
               <a:buNone/>
             </a:pPr>
             <a:r>
@@ -1913,7 +1692,7 @@
           <a:bodyPr wrap="square" lIns="0" tIns="0" rIns="0" bIns="0" rtlCol="0" anchor="t"/>
           <a:lstStyle/>
           <a:p>
-            <a:pPr indent="0" marL="0">
+            <a:pPr marL="0" indent="0">
               <a:lnSpc>
                 <a:spcPts val="2100"/>
               </a:lnSpc>
@@ -1982,7 +1761,7 @@
           <a:bodyPr wrap="square" lIns="0" tIns="0" rIns="0" bIns="0" rtlCol="0" anchor="ctr"/>
           <a:lstStyle/>
           <a:p>
-            <a:pPr indent="0" marL="0">
+            <a:pPr marL="0" indent="0">
               <a:buNone/>
             </a:pPr>
             <a:r>
@@ -2021,7 +1800,7 @@
           <a:bodyPr wrap="square" lIns="0" tIns="0" rIns="0" bIns="0" rtlCol="0" anchor="t"/>
           <a:lstStyle/>
           <a:p>
-            <a:pPr indent="0" marL="0">
+            <a:pPr marL="0" indent="0">
               <a:lnSpc>
                 <a:spcPts val="1700"/>
               </a:lnSpc>
@@ -2090,7 +1869,7 @@
           <a:bodyPr wrap="square" lIns="0" tIns="0" rIns="0" bIns="0" rtlCol="0" anchor="ctr"/>
           <a:lstStyle/>
           <a:p>
-            <a:pPr indent="0" marL="0">
+            <a:pPr marL="0" indent="0">
               <a:buNone/>
             </a:pPr>
             <a:r>
@@ -2129,7 +1908,7 @@
           <a:bodyPr wrap="square" lIns="0" tIns="0" rIns="0" bIns="0" rtlCol="0" anchor="t"/>
           <a:lstStyle/>
           <a:p>
-            <a:pPr indent="0" marL="0">
+            <a:pPr marL="0" indent="0">
               <a:lnSpc>
                 <a:spcPts val="1700"/>
               </a:lnSpc>
@@ -2198,7 +1977,7 @@
           <a:bodyPr wrap="square" lIns="0" tIns="0" rIns="0" bIns="0" rtlCol="0" anchor="ctr"/>
           <a:lstStyle/>
           <a:p>
-            <a:pPr indent="0" marL="0">
+            <a:pPr marL="0" indent="0">
               <a:buNone/>
             </a:pPr>
             <a:r>
@@ -2237,7 +2016,7 @@
           <a:bodyPr wrap="square" lIns="0" tIns="0" rIns="0" bIns="0" rtlCol="0" anchor="t"/>
           <a:lstStyle/>
           <a:p>
-            <a:pPr indent="0" marL="0">
+            <a:pPr marL="0" indent="0">
               <a:lnSpc>
                 <a:spcPts val="1700"/>
               </a:lnSpc>
@@ -2274,6 +2053,7 @@
         <a:solidFill>
           <a:srgbClr val="0A0A12"/>
         </a:solidFill>
+        <a:effectLst/>
       </p:bgPr>
     </p:bg>
     <p:spTree>
@@ -2311,7 +2091,7 @@
           <a:bodyPr wrap="square" lIns="0" tIns="0" rIns="0" bIns="0" rtlCol="0" anchor="ctr"/>
           <a:lstStyle/>
           <a:p>
-            <a:pPr indent="0" marL="0">
+            <a:pPr marL="0" indent="0">
               <a:buNone/>
             </a:pPr>
             <a:r>
@@ -2402,7 +2182,7 @@
           <a:bodyPr wrap="square" lIns="0" tIns="0" rIns="0" bIns="0" rtlCol="0" anchor="ctr"/>
           <a:lstStyle/>
           <a:p>
-            <a:pPr algn="ctr" indent="0" marL="0">
+            <a:pPr marL="0" indent="0" algn="ctr">
               <a:buNone/>
             </a:pPr>
             <a:r>
@@ -2441,7 +2221,7 @@
           <a:bodyPr wrap="square" lIns="0" tIns="0" rIns="0" bIns="0" rtlCol="0" anchor="ctr"/>
           <a:lstStyle/>
           <a:p>
-            <a:pPr indent="0" marL="0">
+            <a:pPr marL="0" indent="0">
               <a:buNone/>
             </a:pPr>
             <a:r>
@@ -2480,7 +2260,7 @@
           <a:bodyPr wrap="square" lIns="0" tIns="0" rIns="0" bIns="0" rtlCol="0" anchor="t"/>
           <a:lstStyle/>
           <a:p>
-            <a:pPr indent="0" marL="0">
+            <a:pPr marL="0" indent="0">
               <a:lnSpc>
                 <a:spcPts val="1700"/>
               </a:lnSpc>
@@ -2574,7 +2354,7 @@
           <a:bodyPr wrap="square" lIns="0" tIns="0" rIns="0" bIns="0" rtlCol="0" anchor="ctr"/>
           <a:lstStyle/>
           <a:p>
-            <a:pPr algn="ctr" indent="0" marL="0">
+            <a:pPr marL="0" indent="0" algn="ctr">
               <a:buNone/>
             </a:pPr>
             <a:r>
@@ -2613,7 +2393,7 @@
           <a:bodyPr wrap="square" lIns="0" tIns="0" rIns="0" bIns="0" rtlCol="0" anchor="ctr"/>
           <a:lstStyle/>
           <a:p>
-            <a:pPr indent="0" marL="0">
+            <a:pPr marL="0" indent="0">
               <a:buNone/>
             </a:pPr>
             <a:r>
@@ -2652,7 +2432,7 @@
           <a:bodyPr wrap="square" lIns="0" tIns="0" rIns="0" bIns="0" rtlCol="0" anchor="t"/>
           <a:lstStyle/>
           <a:p>
-            <a:pPr indent="0" marL="0">
+            <a:pPr marL="0" indent="0">
               <a:lnSpc>
                 <a:spcPts val="1700"/>
               </a:lnSpc>
@@ -2746,7 +2526,7 @@
           <a:bodyPr wrap="square" lIns="0" tIns="0" rIns="0" bIns="0" rtlCol="0" anchor="ctr"/>
           <a:lstStyle/>
           <a:p>
-            <a:pPr algn="ctr" indent="0" marL="0">
+            <a:pPr marL="0" indent="0" algn="ctr">
               <a:buNone/>
             </a:pPr>
             <a:r>
@@ -2785,7 +2565,7 @@
           <a:bodyPr wrap="square" lIns="0" tIns="0" rIns="0" bIns="0" rtlCol="0" anchor="ctr"/>
           <a:lstStyle/>
           <a:p>
-            <a:pPr indent="0" marL="0">
+            <a:pPr marL="0" indent="0">
               <a:buNone/>
             </a:pPr>
             <a:r>
@@ -2824,7 +2604,7 @@
           <a:bodyPr wrap="square" lIns="0" tIns="0" rIns="0" bIns="0" rtlCol="0" anchor="t"/>
           <a:lstStyle/>
           <a:p>
-            <a:pPr indent="0" marL="0">
+            <a:pPr marL="0" indent="0">
               <a:lnSpc>
                 <a:spcPts val="1700"/>
               </a:lnSpc>
@@ -2918,7 +2698,7 @@
           <a:bodyPr wrap="square" lIns="0" tIns="0" rIns="0" bIns="0" rtlCol="0" anchor="ctr"/>
           <a:lstStyle/>
           <a:p>
-            <a:pPr algn="ctr" indent="0" marL="0">
+            <a:pPr marL="0" indent="0" algn="ctr">
               <a:buNone/>
             </a:pPr>
             <a:r>
@@ -2957,7 +2737,7 @@
           <a:bodyPr wrap="square" lIns="0" tIns="0" rIns="0" bIns="0" rtlCol="0" anchor="ctr"/>
           <a:lstStyle/>
           <a:p>
-            <a:pPr indent="0" marL="0">
+            <a:pPr marL="0" indent="0">
               <a:buNone/>
             </a:pPr>
             <a:r>
@@ -2996,7 +2776,7 @@
           <a:bodyPr wrap="square" lIns="0" tIns="0" rIns="0" bIns="0" rtlCol="0" anchor="t"/>
           <a:lstStyle/>
           <a:p>
-            <a:pPr indent="0" marL="0">
+            <a:pPr marL="0" indent="0">
               <a:lnSpc>
                 <a:spcPts val="1700"/>
               </a:lnSpc>
@@ -3065,7 +2845,7 @@
           <a:bodyPr wrap="square" lIns="0" tIns="0" rIns="0" bIns="0" rtlCol="0" anchor="ctr"/>
           <a:lstStyle/>
           <a:p>
-            <a:pPr indent="0" marL="0">
+            <a:pPr marL="0" indent="0">
               <a:buNone/>
             </a:pPr>
             <a:r>
@@ -3079,9 +2859,6 @@
               </a:rPr>
               <a:t>The kitchen keeps 100% of the order.</a:t>
             </a:r>
-            <a:pPr indent="0" marL="0">
-              <a:buNone/>
-            </a:pPr>
             <a:r>
               <a:rPr lang="en-US" sz="1400" dirty="0">
                 <a:solidFill>
@@ -3113,6 +2890,7 @@
         <a:solidFill>
           <a:srgbClr val="0A0A12"/>
         </a:solidFill>
+        <a:effectLst/>
       </p:bgPr>
     </p:bg>
     <p:spTree>
@@ -3150,7 +2928,7 @@
           <a:bodyPr wrap="square" lIns="0" tIns="0" rIns="0" bIns="0" rtlCol="0" anchor="ctr"/>
           <a:lstStyle/>
           <a:p>
-            <a:pPr indent="0" marL="0">
+            <a:pPr marL="0" indent="0">
               <a:buNone/>
             </a:pPr>
             <a:r>
@@ -3189,7 +2967,7 @@
           <a:bodyPr wrap="square" lIns="0" tIns="0" rIns="0" bIns="0" rtlCol="0" anchor="ctr"/>
           <a:lstStyle/>
           <a:p>
-            <a:pPr indent="0" marL="0">
+            <a:pPr marL="0" indent="0">
               <a:buNone/>
             </a:pPr>
             <a:r>
@@ -3280,7 +3058,7 @@
           <a:bodyPr wrap="square" lIns="0" tIns="0" rIns="0" bIns="0" rtlCol="0" anchor="t"/>
           <a:lstStyle/>
           <a:p>
-            <a:pPr indent="0" marL="0">
+            <a:pPr marL="0" indent="0">
               <a:lnSpc>
                 <a:spcPts val="1800"/>
               </a:lnSpc>
@@ -3322,7 +3100,7 @@
           <a:bodyPr wrap="square" lIns="0" tIns="0" rIns="0" bIns="0" rtlCol="0" anchor="t"/>
           <a:lstStyle/>
           <a:p>
-            <a:pPr indent="0" marL="0">
+            <a:pPr marL="0" indent="0">
               <a:lnSpc>
                 <a:spcPts val="1500"/>
               </a:lnSpc>
@@ -3416,7 +3194,7 @@
           <a:bodyPr wrap="square" lIns="0" tIns="0" rIns="0" bIns="0" rtlCol="0" anchor="t"/>
           <a:lstStyle/>
           <a:p>
-            <a:pPr indent="0" marL="0">
+            <a:pPr marL="0" indent="0">
               <a:lnSpc>
                 <a:spcPts val="1800"/>
               </a:lnSpc>
@@ -3458,7 +3236,7 @@
           <a:bodyPr wrap="square" lIns="0" tIns="0" rIns="0" bIns="0" rtlCol="0" anchor="t"/>
           <a:lstStyle/>
           <a:p>
-            <a:pPr indent="0" marL="0">
+            <a:pPr marL="0" indent="0">
               <a:lnSpc>
                 <a:spcPts val="1500"/>
               </a:lnSpc>
@@ -3552,7 +3330,7 @@
           <a:bodyPr wrap="square" lIns="0" tIns="0" rIns="0" bIns="0" rtlCol="0" anchor="t"/>
           <a:lstStyle/>
           <a:p>
-            <a:pPr indent="0" marL="0">
+            <a:pPr marL="0" indent="0">
               <a:lnSpc>
                 <a:spcPts val="1800"/>
               </a:lnSpc>
@@ -3594,7 +3372,7 @@
           <a:bodyPr wrap="square" lIns="0" tIns="0" rIns="0" bIns="0" rtlCol="0" anchor="t"/>
           <a:lstStyle/>
           <a:p>
-            <a:pPr indent="0" marL="0">
+            <a:pPr marL="0" indent="0">
               <a:lnSpc>
                 <a:spcPts val="1500"/>
               </a:lnSpc>
@@ -3688,7 +3466,7 @@
           <a:bodyPr wrap="square" lIns="0" tIns="0" rIns="0" bIns="0" rtlCol="0" anchor="t"/>
           <a:lstStyle/>
           <a:p>
-            <a:pPr indent="0" marL="0">
+            <a:pPr marL="0" indent="0">
               <a:lnSpc>
                 <a:spcPts val="1800"/>
               </a:lnSpc>
@@ -3730,7 +3508,7 @@
           <a:bodyPr wrap="square" lIns="0" tIns="0" rIns="0" bIns="0" rtlCol="0" anchor="t"/>
           <a:lstStyle/>
           <a:p>
-            <a:pPr indent="0" marL="0">
+            <a:pPr marL="0" indent="0">
               <a:lnSpc>
                 <a:spcPts val="1500"/>
               </a:lnSpc>
@@ -3824,7 +3602,7 @@
           <a:bodyPr wrap="square" lIns="0" tIns="0" rIns="0" bIns="0" rtlCol="0" anchor="t"/>
           <a:lstStyle/>
           <a:p>
-            <a:pPr indent="0" marL="0">
+            <a:pPr marL="0" indent="0">
               <a:lnSpc>
                 <a:spcPts val="1800"/>
               </a:lnSpc>
@@ -3866,7 +3644,7 @@
           <a:bodyPr wrap="square" lIns="0" tIns="0" rIns="0" bIns="0" rtlCol="0" anchor="t"/>
           <a:lstStyle/>
           <a:p>
-            <a:pPr indent="0" marL="0">
+            <a:pPr marL="0" indent="0">
               <a:lnSpc>
                 <a:spcPts val="1500"/>
               </a:lnSpc>
@@ -3935,7 +3713,7 @@
           <a:bodyPr wrap="square" lIns="0" tIns="0" rIns="0" bIns="0" rtlCol="0" anchor="ctr"/>
           <a:lstStyle/>
           <a:p>
-            <a:pPr indent="0" marL="0">
+            <a:pPr marL="0" indent="0">
               <a:buNone/>
             </a:pPr>
             <a:r>
@@ -3969,6 +3747,7 @@
         <a:solidFill>
           <a:srgbClr val="0A0A12"/>
         </a:solidFill>
+        <a:effectLst/>
       </p:bgPr>
     </p:bg>
     <p:spTree>
@@ -4006,7 +3785,7 @@
           <a:bodyPr wrap="square" lIns="0" tIns="0" rIns="0" bIns="0" rtlCol="0" anchor="ctr"/>
           <a:lstStyle/>
           <a:p>
-            <a:pPr indent="0" marL="0">
+            <a:pPr marL="0" indent="0">
               <a:buNone/>
             </a:pPr>
             <a:r>
@@ -4097,7 +3876,7 @@
           <a:bodyPr wrap="square" lIns="0" tIns="0" rIns="0" bIns="0" rtlCol="0" anchor="ctr"/>
           <a:lstStyle/>
           <a:p>
-            <a:pPr algn="ctr" indent="0" marL="0">
+            <a:pPr marL="0" indent="0" algn="ctr">
               <a:buNone/>
             </a:pPr>
             <a:r>
@@ -4136,7 +3915,7 @@
           <a:bodyPr wrap="square" lIns="0" tIns="0" rIns="0" bIns="0" rtlCol="0" anchor="ctr"/>
           <a:lstStyle/>
           <a:p>
-            <a:pPr indent="0" marL="0">
+            <a:pPr marL="0" indent="0">
               <a:buNone/>
             </a:pPr>
             <a:r>
@@ -4175,7 +3954,7 @@
           <a:bodyPr wrap="square" lIns="0" tIns="0" rIns="0" bIns="0" rtlCol="0" anchor="t"/>
           <a:lstStyle/>
           <a:p>
-            <a:pPr indent="0" marL="0">
+            <a:pPr marL="0" indent="0">
               <a:lnSpc>
                 <a:spcPts val="1800"/>
               </a:lnSpc>
@@ -4269,7 +4048,7 @@
           <a:bodyPr wrap="square" lIns="0" tIns="0" rIns="0" bIns="0" rtlCol="0" anchor="ctr"/>
           <a:lstStyle/>
           <a:p>
-            <a:pPr algn="ctr" indent="0" marL="0">
+            <a:pPr marL="0" indent="0" algn="ctr">
               <a:buNone/>
             </a:pPr>
             <a:r>
@@ -4308,7 +4087,7 @@
           <a:bodyPr wrap="square" lIns="0" tIns="0" rIns="0" bIns="0" rtlCol="0" anchor="ctr"/>
           <a:lstStyle/>
           <a:p>
-            <a:pPr indent="0" marL="0">
+            <a:pPr marL="0" indent="0">
               <a:buNone/>
             </a:pPr>
             <a:r>
@@ -4347,7 +4126,7 @@
           <a:bodyPr wrap="square" lIns="0" tIns="0" rIns="0" bIns="0" rtlCol="0" anchor="t"/>
           <a:lstStyle/>
           <a:p>
-            <a:pPr indent="0" marL="0">
+            <a:pPr marL="0" indent="0">
               <a:lnSpc>
                 <a:spcPts val="1800"/>
               </a:lnSpc>
@@ -4441,7 +4220,7 @@
           <a:bodyPr wrap="square" lIns="0" tIns="0" rIns="0" bIns="0" rtlCol="0" anchor="ctr"/>
           <a:lstStyle/>
           <a:p>
-            <a:pPr algn="ctr" indent="0" marL="0">
+            <a:pPr marL="0" indent="0" algn="ctr">
               <a:buNone/>
             </a:pPr>
             <a:r>
@@ -4480,7 +4259,7 @@
           <a:bodyPr wrap="square" lIns="0" tIns="0" rIns="0" bIns="0" rtlCol="0" anchor="ctr"/>
           <a:lstStyle/>
           <a:p>
-            <a:pPr indent="0" marL="0">
+            <a:pPr marL="0" indent="0">
               <a:buNone/>
             </a:pPr>
             <a:r>
@@ -4519,7 +4298,7 @@
           <a:bodyPr wrap="square" lIns="0" tIns="0" rIns="0" bIns="0" rtlCol="0" anchor="t"/>
           <a:lstStyle/>
           <a:p>
-            <a:pPr indent="0" marL="0">
+            <a:pPr marL="0" indent="0">
               <a:lnSpc>
                 <a:spcPts val="1800"/>
               </a:lnSpc>
@@ -4613,7 +4392,7 @@
           <a:bodyPr wrap="square" lIns="0" tIns="0" rIns="0" bIns="0" rtlCol="0" anchor="ctr"/>
           <a:lstStyle/>
           <a:p>
-            <a:pPr algn="ctr" indent="0" marL="0">
+            <a:pPr marL="0" indent="0" algn="ctr">
               <a:buNone/>
             </a:pPr>
             <a:r>
@@ -4652,7 +4431,7 @@
           <a:bodyPr wrap="square" lIns="0" tIns="0" rIns="0" bIns="0" rtlCol="0" anchor="ctr"/>
           <a:lstStyle/>
           <a:p>
-            <a:pPr indent="0" marL="0">
+            <a:pPr marL="0" indent="0">
               <a:buNone/>
             </a:pPr>
             <a:r>
@@ -4691,7 +4470,7 @@
           <a:bodyPr wrap="square" lIns="0" tIns="0" rIns="0" bIns="0" rtlCol="0" anchor="t"/>
           <a:lstStyle/>
           <a:p>
-            <a:pPr indent="0" marL="0">
+            <a:pPr marL="0" indent="0">
               <a:lnSpc>
                 <a:spcPts val="1800"/>
               </a:lnSpc>
@@ -4717,6 +4496,1416 @@
   <p:clrMapOvr>
     <a:masterClrMapping/>
   </p:clrMapOvr>
+  <p:timing>
+    <p:tnLst>
+      <p:par>
+        <p:cTn id="1" dur="indefinite" restart="never" nodeType="tmRoot">
+          <p:childTnLst>
+            <p:seq concurrent="1" nextAc="seek">
+              <p:cTn id="2" dur="indefinite" nodeType="mainSeq">
+                <p:childTnLst>
+                  <p:par>
+                    <p:cTn id="3" fill="hold">
+                      <p:stCondLst>
+                        <p:cond delay="indefinite"/>
+                      </p:stCondLst>
+                      <p:childTnLst>
+                        <p:par>
+                          <p:cTn id="4" fill="hold">
+                            <p:stCondLst>
+                              <p:cond delay="0"/>
+                            </p:stCondLst>
+                            <p:childTnLst>
+                              <p:par>
+                                <p:cTn id="5" presetID="42" presetClass="entr" presetSubtype="0" fill="hold" grpId="0" nodeType="clickEffect">
+                                  <p:stCondLst>
+                                    <p:cond delay="0"/>
+                                  </p:stCondLst>
+                                  <p:childTnLst>
+                                    <p:set>
+                                      <p:cBhvr>
+                                        <p:cTn id="6" dur="1" fill="hold">
+                                          <p:stCondLst>
+                                            <p:cond delay="0"/>
+                                          </p:stCondLst>
+                                        </p:cTn>
+                                        <p:tgtEl>
+                                          <p:spTgt spid="5"/>
+                                        </p:tgtEl>
+                                        <p:attrNameLst>
+                                          <p:attrName>style.visibility</p:attrName>
+                                        </p:attrNameLst>
+                                      </p:cBhvr>
+                                      <p:to>
+                                        <p:strVal val="visible"/>
+                                      </p:to>
+                                    </p:set>
+                                    <p:animEffect transition="in" filter="fade">
+                                      <p:cBhvr>
+                                        <p:cTn id="7" dur="1000"/>
+                                        <p:tgtEl>
+                                          <p:spTgt spid="5"/>
+                                        </p:tgtEl>
+                                      </p:cBhvr>
+                                    </p:animEffect>
+                                    <p:anim calcmode="lin" valueType="num">
+                                      <p:cBhvr>
+                                        <p:cTn id="8" dur="1000" fill="hold"/>
+                                        <p:tgtEl>
+                                          <p:spTgt spid="5"/>
+                                        </p:tgtEl>
+                                        <p:attrNameLst>
+                                          <p:attrName>ppt_x</p:attrName>
+                                        </p:attrNameLst>
+                                      </p:cBhvr>
+                                      <p:tavLst>
+                                        <p:tav tm="0">
+                                          <p:val>
+                                            <p:strVal val="#ppt_x"/>
+                                          </p:val>
+                                        </p:tav>
+                                        <p:tav tm="100000">
+                                          <p:val>
+                                            <p:strVal val="#ppt_x"/>
+                                          </p:val>
+                                        </p:tav>
+                                      </p:tavLst>
+                                    </p:anim>
+                                    <p:anim calcmode="lin" valueType="num">
+                                      <p:cBhvr>
+                                        <p:cTn id="9" dur="1000" fill="hold"/>
+                                        <p:tgtEl>
+                                          <p:spTgt spid="5"/>
+                                        </p:tgtEl>
+                                        <p:attrNameLst>
+                                          <p:attrName>ppt_y</p:attrName>
+                                        </p:attrNameLst>
+                                      </p:cBhvr>
+                                      <p:tavLst>
+                                        <p:tav tm="0">
+                                          <p:val>
+                                            <p:strVal val="#ppt_y+.1"/>
+                                          </p:val>
+                                        </p:tav>
+                                        <p:tav tm="100000">
+                                          <p:val>
+                                            <p:strVal val="#ppt_y"/>
+                                          </p:val>
+                                        </p:tav>
+                                      </p:tavLst>
+                                    </p:anim>
+                                  </p:childTnLst>
+                                </p:cTn>
+                              </p:par>
+                              <p:par>
+                                <p:cTn id="10" presetID="42" presetClass="entr" presetSubtype="0" fill="hold" nodeType="withEffect">
+                                  <p:stCondLst>
+                                    <p:cond delay="0"/>
+                                  </p:stCondLst>
+                                  <p:childTnLst>
+                                    <p:set>
+                                      <p:cBhvr>
+                                        <p:cTn id="11" dur="1" fill="hold">
+                                          <p:stCondLst>
+                                            <p:cond delay="0"/>
+                                          </p:stCondLst>
+                                        </p:cTn>
+                                        <p:tgtEl>
+                                          <p:spTgt spid="3"/>
+                                        </p:tgtEl>
+                                        <p:attrNameLst>
+                                          <p:attrName>style.visibility</p:attrName>
+                                        </p:attrNameLst>
+                                      </p:cBhvr>
+                                      <p:to>
+                                        <p:strVal val="visible"/>
+                                      </p:to>
+                                    </p:set>
+                                    <p:animEffect transition="in" filter="fade">
+                                      <p:cBhvr>
+                                        <p:cTn id="12" dur="1000"/>
+                                        <p:tgtEl>
+                                          <p:spTgt spid="3"/>
+                                        </p:tgtEl>
+                                      </p:cBhvr>
+                                    </p:animEffect>
+                                    <p:anim calcmode="lin" valueType="num">
+                                      <p:cBhvr>
+                                        <p:cTn id="13" dur="1000" fill="hold"/>
+                                        <p:tgtEl>
+                                          <p:spTgt spid="3"/>
+                                        </p:tgtEl>
+                                        <p:attrNameLst>
+                                          <p:attrName>ppt_x</p:attrName>
+                                        </p:attrNameLst>
+                                      </p:cBhvr>
+                                      <p:tavLst>
+                                        <p:tav tm="0">
+                                          <p:val>
+                                            <p:strVal val="#ppt_x"/>
+                                          </p:val>
+                                        </p:tav>
+                                        <p:tav tm="100000">
+                                          <p:val>
+                                            <p:strVal val="#ppt_x"/>
+                                          </p:val>
+                                        </p:tav>
+                                      </p:tavLst>
+                                    </p:anim>
+                                    <p:anim calcmode="lin" valueType="num">
+                                      <p:cBhvr>
+                                        <p:cTn id="14" dur="1000" fill="hold"/>
+                                        <p:tgtEl>
+                                          <p:spTgt spid="3"/>
+                                        </p:tgtEl>
+                                        <p:attrNameLst>
+                                          <p:attrName>ppt_y</p:attrName>
+                                        </p:attrNameLst>
+                                      </p:cBhvr>
+                                      <p:tavLst>
+                                        <p:tav tm="0">
+                                          <p:val>
+                                            <p:strVal val="#ppt_y+.1"/>
+                                          </p:val>
+                                        </p:tav>
+                                        <p:tav tm="100000">
+                                          <p:val>
+                                            <p:strVal val="#ppt_y"/>
+                                          </p:val>
+                                        </p:tav>
+                                      </p:tavLst>
+                                    </p:anim>
+                                  </p:childTnLst>
+                                </p:cTn>
+                              </p:par>
+                              <p:par>
+                                <p:cTn id="15" presetID="42" presetClass="entr" presetSubtype="0" fill="hold" grpId="0" nodeType="withEffect">
+                                  <p:stCondLst>
+                                    <p:cond delay="0"/>
+                                  </p:stCondLst>
+                                  <p:childTnLst>
+                                    <p:set>
+                                      <p:cBhvr>
+                                        <p:cTn id="16" dur="1" fill="hold">
+                                          <p:stCondLst>
+                                            <p:cond delay="0"/>
+                                          </p:stCondLst>
+                                        </p:cTn>
+                                        <p:tgtEl>
+                                          <p:spTgt spid="6"/>
+                                        </p:tgtEl>
+                                        <p:attrNameLst>
+                                          <p:attrName>style.visibility</p:attrName>
+                                        </p:attrNameLst>
+                                      </p:cBhvr>
+                                      <p:to>
+                                        <p:strVal val="visible"/>
+                                      </p:to>
+                                    </p:set>
+                                    <p:animEffect transition="in" filter="fade">
+                                      <p:cBhvr>
+                                        <p:cTn id="17" dur="1000"/>
+                                        <p:tgtEl>
+                                          <p:spTgt spid="6"/>
+                                        </p:tgtEl>
+                                      </p:cBhvr>
+                                    </p:animEffect>
+                                    <p:anim calcmode="lin" valueType="num">
+                                      <p:cBhvr>
+                                        <p:cTn id="18" dur="1000" fill="hold"/>
+                                        <p:tgtEl>
+                                          <p:spTgt spid="6"/>
+                                        </p:tgtEl>
+                                        <p:attrNameLst>
+                                          <p:attrName>ppt_x</p:attrName>
+                                        </p:attrNameLst>
+                                      </p:cBhvr>
+                                      <p:tavLst>
+                                        <p:tav tm="0">
+                                          <p:val>
+                                            <p:strVal val="#ppt_x"/>
+                                          </p:val>
+                                        </p:tav>
+                                        <p:tav tm="100000">
+                                          <p:val>
+                                            <p:strVal val="#ppt_x"/>
+                                          </p:val>
+                                        </p:tav>
+                                      </p:tavLst>
+                                    </p:anim>
+                                    <p:anim calcmode="lin" valueType="num">
+                                      <p:cBhvr>
+                                        <p:cTn id="19" dur="1000" fill="hold"/>
+                                        <p:tgtEl>
+                                          <p:spTgt spid="6"/>
+                                        </p:tgtEl>
+                                        <p:attrNameLst>
+                                          <p:attrName>ppt_y</p:attrName>
+                                        </p:attrNameLst>
+                                      </p:cBhvr>
+                                      <p:tavLst>
+                                        <p:tav tm="0">
+                                          <p:val>
+                                            <p:strVal val="#ppt_y+.1"/>
+                                          </p:val>
+                                        </p:tav>
+                                        <p:tav tm="100000">
+                                          <p:val>
+                                            <p:strVal val="#ppt_y"/>
+                                          </p:val>
+                                        </p:tav>
+                                      </p:tavLst>
+                                    </p:anim>
+                                  </p:childTnLst>
+                                </p:cTn>
+                              </p:par>
+                              <p:par>
+                                <p:cTn id="20" presetID="42" presetClass="entr" presetSubtype="0" fill="hold" grpId="0" nodeType="withEffect">
+                                  <p:stCondLst>
+                                    <p:cond delay="0"/>
+                                  </p:stCondLst>
+                                  <p:childTnLst>
+                                    <p:set>
+                                      <p:cBhvr>
+                                        <p:cTn id="21" dur="1" fill="hold">
+                                          <p:stCondLst>
+                                            <p:cond delay="0"/>
+                                          </p:stCondLst>
+                                        </p:cTn>
+                                        <p:tgtEl>
+                                          <p:spTgt spid="7"/>
+                                        </p:tgtEl>
+                                        <p:attrNameLst>
+                                          <p:attrName>style.visibility</p:attrName>
+                                        </p:attrNameLst>
+                                      </p:cBhvr>
+                                      <p:to>
+                                        <p:strVal val="visible"/>
+                                      </p:to>
+                                    </p:set>
+                                    <p:animEffect transition="in" filter="fade">
+                                      <p:cBhvr>
+                                        <p:cTn id="22" dur="1000"/>
+                                        <p:tgtEl>
+                                          <p:spTgt spid="7"/>
+                                        </p:tgtEl>
+                                      </p:cBhvr>
+                                    </p:animEffect>
+                                    <p:anim calcmode="lin" valueType="num">
+                                      <p:cBhvr>
+                                        <p:cTn id="23" dur="1000" fill="hold"/>
+                                        <p:tgtEl>
+                                          <p:spTgt spid="7"/>
+                                        </p:tgtEl>
+                                        <p:attrNameLst>
+                                          <p:attrName>ppt_x</p:attrName>
+                                        </p:attrNameLst>
+                                      </p:cBhvr>
+                                      <p:tavLst>
+                                        <p:tav tm="0">
+                                          <p:val>
+                                            <p:strVal val="#ppt_x"/>
+                                          </p:val>
+                                        </p:tav>
+                                        <p:tav tm="100000">
+                                          <p:val>
+                                            <p:strVal val="#ppt_x"/>
+                                          </p:val>
+                                        </p:tav>
+                                      </p:tavLst>
+                                    </p:anim>
+                                    <p:anim calcmode="lin" valueType="num">
+                                      <p:cBhvr>
+                                        <p:cTn id="24" dur="1000" fill="hold"/>
+                                        <p:tgtEl>
+                                          <p:spTgt spid="7"/>
+                                        </p:tgtEl>
+                                        <p:attrNameLst>
+                                          <p:attrName>ppt_y</p:attrName>
+                                        </p:attrNameLst>
+                                      </p:cBhvr>
+                                      <p:tavLst>
+                                        <p:tav tm="0">
+                                          <p:val>
+                                            <p:strVal val="#ppt_y+.1"/>
+                                          </p:val>
+                                        </p:tav>
+                                        <p:tav tm="100000">
+                                          <p:val>
+                                            <p:strVal val="#ppt_y"/>
+                                          </p:val>
+                                        </p:tav>
+                                      </p:tavLst>
+                                    </p:anim>
+                                  </p:childTnLst>
+                                </p:cTn>
+                              </p:par>
+                            </p:childTnLst>
+                          </p:cTn>
+                        </p:par>
+                      </p:childTnLst>
+                    </p:cTn>
+                  </p:par>
+                  <p:par>
+                    <p:cTn id="25" fill="hold">
+                      <p:stCondLst>
+                        <p:cond delay="indefinite"/>
+                      </p:stCondLst>
+                      <p:childTnLst>
+                        <p:par>
+                          <p:cTn id="26" fill="hold">
+                            <p:stCondLst>
+                              <p:cond delay="0"/>
+                            </p:stCondLst>
+                            <p:childTnLst>
+                              <p:par>
+                                <p:cTn id="27" presetID="42" presetClass="entr" presetSubtype="0" fill="hold" nodeType="clickEffect">
+                                  <p:stCondLst>
+                                    <p:cond delay="0"/>
+                                  </p:stCondLst>
+                                  <p:childTnLst>
+                                    <p:set>
+                                      <p:cBhvr>
+                                        <p:cTn id="28" dur="1" fill="hold">
+                                          <p:stCondLst>
+                                            <p:cond delay="0"/>
+                                          </p:stCondLst>
+                                        </p:cTn>
+                                        <p:tgtEl>
+                                          <p:spTgt spid="9"/>
+                                        </p:tgtEl>
+                                        <p:attrNameLst>
+                                          <p:attrName>style.visibility</p:attrName>
+                                        </p:attrNameLst>
+                                      </p:cBhvr>
+                                      <p:to>
+                                        <p:strVal val="visible"/>
+                                      </p:to>
+                                    </p:set>
+                                    <p:animEffect transition="in" filter="fade">
+                                      <p:cBhvr>
+                                        <p:cTn id="29" dur="1000"/>
+                                        <p:tgtEl>
+                                          <p:spTgt spid="9"/>
+                                        </p:tgtEl>
+                                      </p:cBhvr>
+                                    </p:animEffect>
+                                    <p:anim calcmode="lin" valueType="num">
+                                      <p:cBhvr>
+                                        <p:cTn id="30" dur="1000" fill="hold"/>
+                                        <p:tgtEl>
+                                          <p:spTgt spid="9"/>
+                                        </p:tgtEl>
+                                        <p:attrNameLst>
+                                          <p:attrName>ppt_x</p:attrName>
+                                        </p:attrNameLst>
+                                      </p:cBhvr>
+                                      <p:tavLst>
+                                        <p:tav tm="0">
+                                          <p:val>
+                                            <p:strVal val="#ppt_x"/>
+                                          </p:val>
+                                        </p:tav>
+                                        <p:tav tm="100000">
+                                          <p:val>
+                                            <p:strVal val="#ppt_x"/>
+                                          </p:val>
+                                        </p:tav>
+                                      </p:tavLst>
+                                    </p:anim>
+                                    <p:anim calcmode="lin" valueType="num">
+                                      <p:cBhvr>
+                                        <p:cTn id="31" dur="1000" fill="hold"/>
+                                        <p:tgtEl>
+                                          <p:spTgt spid="9"/>
+                                        </p:tgtEl>
+                                        <p:attrNameLst>
+                                          <p:attrName>ppt_y</p:attrName>
+                                        </p:attrNameLst>
+                                      </p:cBhvr>
+                                      <p:tavLst>
+                                        <p:tav tm="0">
+                                          <p:val>
+                                            <p:strVal val="#ppt_y+.1"/>
+                                          </p:val>
+                                        </p:tav>
+                                        <p:tav tm="100000">
+                                          <p:val>
+                                            <p:strVal val="#ppt_y"/>
+                                          </p:val>
+                                        </p:tav>
+                                      </p:tavLst>
+                                    </p:anim>
+                                  </p:childTnLst>
+                                </p:cTn>
+                              </p:par>
+                              <p:par>
+                                <p:cTn id="32" presetID="42" presetClass="entr" presetSubtype="0" fill="hold" nodeType="withEffect">
+                                  <p:stCondLst>
+                                    <p:cond delay="0"/>
+                                  </p:stCondLst>
+                                  <p:childTnLst>
+                                    <p:set>
+                                      <p:cBhvr>
+                                        <p:cTn id="33" dur="1" fill="hold">
+                                          <p:stCondLst>
+                                            <p:cond delay="0"/>
+                                          </p:stCondLst>
+                                        </p:cTn>
+                                        <p:tgtEl>
+                                          <p:spTgt spid="8"/>
+                                        </p:tgtEl>
+                                        <p:attrNameLst>
+                                          <p:attrName>style.visibility</p:attrName>
+                                        </p:attrNameLst>
+                                      </p:cBhvr>
+                                      <p:to>
+                                        <p:strVal val="visible"/>
+                                      </p:to>
+                                    </p:set>
+                                    <p:animEffect transition="in" filter="fade">
+                                      <p:cBhvr>
+                                        <p:cTn id="34" dur="1000"/>
+                                        <p:tgtEl>
+                                          <p:spTgt spid="8"/>
+                                        </p:tgtEl>
+                                      </p:cBhvr>
+                                    </p:animEffect>
+                                    <p:anim calcmode="lin" valueType="num">
+                                      <p:cBhvr>
+                                        <p:cTn id="35" dur="1000" fill="hold"/>
+                                        <p:tgtEl>
+                                          <p:spTgt spid="8"/>
+                                        </p:tgtEl>
+                                        <p:attrNameLst>
+                                          <p:attrName>ppt_x</p:attrName>
+                                        </p:attrNameLst>
+                                      </p:cBhvr>
+                                      <p:tavLst>
+                                        <p:tav tm="0">
+                                          <p:val>
+                                            <p:strVal val="#ppt_x"/>
+                                          </p:val>
+                                        </p:tav>
+                                        <p:tav tm="100000">
+                                          <p:val>
+                                            <p:strVal val="#ppt_x"/>
+                                          </p:val>
+                                        </p:tav>
+                                      </p:tavLst>
+                                    </p:anim>
+                                    <p:anim calcmode="lin" valueType="num">
+                                      <p:cBhvr>
+                                        <p:cTn id="36" dur="1000" fill="hold"/>
+                                        <p:tgtEl>
+                                          <p:spTgt spid="8"/>
+                                        </p:tgtEl>
+                                        <p:attrNameLst>
+                                          <p:attrName>ppt_y</p:attrName>
+                                        </p:attrNameLst>
+                                      </p:cBhvr>
+                                      <p:tavLst>
+                                        <p:tav tm="0">
+                                          <p:val>
+                                            <p:strVal val="#ppt_y+.1"/>
+                                          </p:val>
+                                        </p:tav>
+                                        <p:tav tm="100000">
+                                          <p:val>
+                                            <p:strVal val="#ppt_y"/>
+                                          </p:val>
+                                        </p:tav>
+                                      </p:tavLst>
+                                    </p:anim>
+                                  </p:childTnLst>
+                                </p:cTn>
+                              </p:par>
+                              <p:par>
+                                <p:cTn id="37" presetID="42" presetClass="entr" presetSubtype="0" fill="hold" grpId="0" nodeType="withEffect">
+                                  <p:stCondLst>
+                                    <p:cond delay="0"/>
+                                  </p:stCondLst>
+                                  <p:childTnLst>
+                                    <p:set>
+                                      <p:cBhvr>
+                                        <p:cTn id="38" dur="1" fill="hold">
+                                          <p:stCondLst>
+                                            <p:cond delay="0"/>
+                                          </p:stCondLst>
+                                        </p:cTn>
+                                        <p:tgtEl>
+                                          <p:spTgt spid="11"/>
+                                        </p:tgtEl>
+                                        <p:attrNameLst>
+                                          <p:attrName>style.visibility</p:attrName>
+                                        </p:attrNameLst>
+                                      </p:cBhvr>
+                                      <p:to>
+                                        <p:strVal val="visible"/>
+                                      </p:to>
+                                    </p:set>
+                                    <p:animEffect transition="in" filter="fade">
+                                      <p:cBhvr>
+                                        <p:cTn id="39" dur="1000"/>
+                                        <p:tgtEl>
+                                          <p:spTgt spid="11"/>
+                                        </p:tgtEl>
+                                      </p:cBhvr>
+                                    </p:animEffect>
+                                    <p:anim calcmode="lin" valueType="num">
+                                      <p:cBhvr>
+                                        <p:cTn id="40" dur="1000" fill="hold"/>
+                                        <p:tgtEl>
+                                          <p:spTgt spid="11"/>
+                                        </p:tgtEl>
+                                        <p:attrNameLst>
+                                          <p:attrName>ppt_x</p:attrName>
+                                        </p:attrNameLst>
+                                      </p:cBhvr>
+                                      <p:tavLst>
+                                        <p:tav tm="0">
+                                          <p:val>
+                                            <p:strVal val="#ppt_x"/>
+                                          </p:val>
+                                        </p:tav>
+                                        <p:tav tm="100000">
+                                          <p:val>
+                                            <p:strVal val="#ppt_x"/>
+                                          </p:val>
+                                        </p:tav>
+                                      </p:tavLst>
+                                    </p:anim>
+                                    <p:anim calcmode="lin" valueType="num">
+                                      <p:cBhvr>
+                                        <p:cTn id="41" dur="1000" fill="hold"/>
+                                        <p:tgtEl>
+                                          <p:spTgt spid="11"/>
+                                        </p:tgtEl>
+                                        <p:attrNameLst>
+                                          <p:attrName>ppt_y</p:attrName>
+                                        </p:attrNameLst>
+                                      </p:cBhvr>
+                                      <p:tavLst>
+                                        <p:tav tm="0">
+                                          <p:val>
+                                            <p:strVal val="#ppt_y+.1"/>
+                                          </p:val>
+                                        </p:tav>
+                                        <p:tav tm="100000">
+                                          <p:val>
+                                            <p:strVal val="#ppt_y"/>
+                                          </p:val>
+                                        </p:tav>
+                                      </p:tavLst>
+                                    </p:anim>
+                                  </p:childTnLst>
+                                </p:cTn>
+                              </p:par>
+                              <p:par>
+                                <p:cTn id="42" presetID="42" presetClass="entr" presetSubtype="0" fill="hold" grpId="0" nodeType="withEffect">
+                                  <p:stCondLst>
+                                    <p:cond delay="0"/>
+                                  </p:stCondLst>
+                                  <p:childTnLst>
+                                    <p:set>
+                                      <p:cBhvr>
+                                        <p:cTn id="43" dur="1" fill="hold">
+                                          <p:stCondLst>
+                                            <p:cond delay="0"/>
+                                          </p:stCondLst>
+                                        </p:cTn>
+                                        <p:tgtEl>
+                                          <p:spTgt spid="12"/>
+                                        </p:tgtEl>
+                                        <p:attrNameLst>
+                                          <p:attrName>style.visibility</p:attrName>
+                                        </p:attrNameLst>
+                                      </p:cBhvr>
+                                      <p:to>
+                                        <p:strVal val="visible"/>
+                                      </p:to>
+                                    </p:set>
+                                    <p:animEffect transition="in" filter="fade">
+                                      <p:cBhvr>
+                                        <p:cTn id="44" dur="1000"/>
+                                        <p:tgtEl>
+                                          <p:spTgt spid="12"/>
+                                        </p:tgtEl>
+                                      </p:cBhvr>
+                                    </p:animEffect>
+                                    <p:anim calcmode="lin" valueType="num">
+                                      <p:cBhvr>
+                                        <p:cTn id="45" dur="1000" fill="hold"/>
+                                        <p:tgtEl>
+                                          <p:spTgt spid="12"/>
+                                        </p:tgtEl>
+                                        <p:attrNameLst>
+                                          <p:attrName>ppt_x</p:attrName>
+                                        </p:attrNameLst>
+                                      </p:cBhvr>
+                                      <p:tavLst>
+                                        <p:tav tm="0">
+                                          <p:val>
+                                            <p:strVal val="#ppt_x"/>
+                                          </p:val>
+                                        </p:tav>
+                                        <p:tav tm="100000">
+                                          <p:val>
+                                            <p:strVal val="#ppt_x"/>
+                                          </p:val>
+                                        </p:tav>
+                                      </p:tavLst>
+                                    </p:anim>
+                                    <p:anim calcmode="lin" valueType="num">
+                                      <p:cBhvr>
+                                        <p:cTn id="46" dur="1000" fill="hold"/>
+                                        <p:tgtEl>
+                                          <p:spTgt spid="12"/>
+                                        </p:tgtEl>
+                                        <p:attrNameLst>
+                                          <p:attrName>ppt_y</p:attrName>
+                                        </p:attrNameLst>
+                                      </p:cBhvr>
+                                      <p:tavLst>
+                                        <p:tav tm="0">
+                                          <p:val>
+                                            <p:strVal val="#ppt_y+.1"/>
+                                          </p:val>
+                                        </p:tav>
+                                        <p:tav tm="100000">
+                                          <p:val>
+                                            <p:strVal val="#ppt_y"/>
+                                          </p:val>
+                                        </p:tav>
+                                      </p:tavLst>
+                                    </p:anim>
+                                  </p:childTnLst>
+                                </p:cTn>
+                              </p:par>
+                            </p:childTnLst>
+                          </p:cTn>
+                        </p:par>
+                      </p:childTnLst>
+                    </p:cTn>
+                  </p:par>
+                  <p:par>
+                    <p:cTn id="47" fill="hold">
+                      <p:stCondLst>
+                        <p:cond delay="indefinite"/>
+                      </p:stCondLst>
+                      <p:childTnLst>
+                        <p:par>
+                          <p:cTn id="48" fill="hold">
+                            <p:stCondLst>
+                              <p:cond delay="0"/>
+                            </p:stCondLst>
+                            <p:childTnLst>
+                              <p:par>
+                                <p:cTn id="49" presetID="42" presetClass="entr" presetSubtype="0" fill="hold" grpId="0" nodeType="clickEffect">
+                                  <p:stCondLst>
+                                    <p:cond delay="0"/>
+                                  </p:stCondLst>
+                                  <p:childTnLst>
+                                    <p:set>
+                                      <p:cBhvr>
+                                        <p:cTn id="50" dur="1" fill="hold">
+                                          <p:stCondLst>
+                                            <p:cond delay="0"/>
+                                          </p:stCondLst>
+                                        </p:cTn>
+                                        <p:tgtEl>
+                                          <p:spTgt spid="15"/>
+                                        </p:tgtEl>
+                                        <p:attrNameLst>
+                                          <p:attrName>style.visibility</p:attrName>
+                                        </p:attrNameLst>
+                                      </p:cBhvr>
+                                      <p:to>
+                                        <p:strVal val="visible"/>
+                                      </p:to>
+                                    </p:set>
+                                    <p:animEffect transition="in" filter="fade">
+                                      <p:cBhvr>
+                                        <p:cTn id="51" dur="1000"/>
+                                        <p:tgtEl>
+                                          <p:spTgt spid="15"/>
+                                        </p:tgtEl>
+                                      </p:cBhvr>
+                                    </p:animEffect>
+                                    <p:anim calcmode="lin" valueType="num">
+                                      <p:cBhvr>
+                                        <p:cTn id="52" dur="1000" fill="hold"/>
+                                        <p:tgtEl>
+                                          <p:spTgt spid="15"/>
+                                        </p:tgtEl>
+                                        <p:attrNameLst>
+                                          <p:attrName>ppt_x</p:attrName>
+                                        </p:attrNameLst>
+                                      </p:cBhvr>
+                                      <p:tavLst>
+                                        <p:tav tm="0">
+                                          <p:val>
+                                            <p:strVal val="#ppt_x"/>
+                                          </p:val>
+                                        </p:tav>
+                                        <p:tav tm="100000">
+                                          <p:val>
+                                            <p:strVal val="#ppt_x"/>
+                                          </p:val>
+                                        </p:tav>
+                                      </p:tavLst>
+                                    </p:anim>
+                                    <p:anim calcmode="lin" valueType="num">
+                                      <p:cBhvr>
+                                        <p:cTn id="53" dur="1000" fill="hold"/>
+                                        <p:tgtEl>
+                                          <p:spTgt spid="15"/>
+                                        </p:tgtEl>
+                                        <p:attrNameLst>
+                                          <p:attrName>ppt_y</p:attrName>
+                                        </p:attrNameLst>
+                                      </p:cBhvr>
+                                      <p:tavLst>
+                                        <p:tav tm="0">
+                                          <p:val>
+                                            <p:strVal val="#ppt_y+.1"/>
+                                          </p:val>
+                                        </p:tav>
+                                        <p:tav tm="100000">
+                                          <p:val>
+                                            <p:strVal val="#ppt_y"/>
+                                          </p:val>
+                                        </p:tav>
+                                      </p:tavLst>
+                                    </p:anim>
+                                  </p:childTnLst>
+                                </p:cTn>
+                              </p:par>
+                              <p:par>
+                                <p:cTn id="54" presetID="42" presetClass="entr" presetSubtype="0" fill="hold" nodeType="withEffect">
+                                  <p:stCondLst>
+                                    <p:cond delay="0"/>
+                                  </p:stCondLst>
+                                  <p:childTnLst>
+                                    <p:set>
+                                      <p:cBhvr>
+                                        <p:cTn id="55" dur="1" fill="hold">
+                                          <p:stCondLst>
+                                            <p:cond delay="0"/>
+                                          </p:stCondLst>
+                                        </p:cTn>
+                                        <p:tgtEl>
+                                          <p:spTgt spid="13"/>
+                                        </p:tgtEl>
+                                        <p:attrNameLst>
+                                          <p:attrName>style.visibility</p:attrName>
+                                        </p:attrNameLst>
+                                      </p:cBhvr>
+                                      <p:to>
+                                        <p:strVal val="visible"/>
+                                      </p:to>
+                                    </p:set>
+                                    <p:animEffect transition="in" filter="fade">
+                                      <p:cBhvr>
+                                        <p:cTn id="56" dur="1000"/>
+                                        <p:tgtEl>
+                                          <p:spTgt spid="13"/>
+                                        </p:tgtEl>
+                                      </p:cBhvr>
+                                    </p:animEffect>
+                                    <p:anim calcmode="lin" valueType="num">
+                                      <p:cBhvr>
+                                        <p:cTn id="57" dur="1000" fill="hold"/>
+                                        <p:tgtEl>
+                                          <p:spTgt spid="13"/>
+                                        </p:tgtEl>
+                                        <p:attrNameLst>
+                                          <p:attrName>ppt_x</p:attrName>
+                                        </p:attrNameLst>
+                                      </p:cBhvr>
+                                      <p:tavLst>
+                                        <p:tav tm="0">
+                                          <p:val>
+                                            <p:strVal val="#ppt_x"/>
+                                          </p:val>
+                                        </p:tav>
+                                        <p:tav tm="100000">
+                                          <p:val>
+                                            <p:strVal val="#ppt_x"/>
+                                          </p:val>
+                                        </p:tav>
+                                      </p:tavLst>
+                                    </p:anim>
+                                    <p:anim calcmode="lin" valueType="num">
+                                      <p:cBhvr>
+                                        <p:cTn id="58" dur="1000" fill="hold"/>
+                                        <p:tgtEl>
+                                          <p:spTgt spid="13"/>
+                                        </p:tgtEl>
+                                        <p:attrNameLst>
+                                          <p:attrName>ppt_y</p:attrName>
+                                        </p:attrNameLst>
+                                      </p:cBhvr>
+                                      <p:tavLst>
+                                        <p:tav tm="0">
+                                          <p:val>
+                                            <p:strVal val="#ppt_y+.1"/>
+                                          </p:val>
+                                        </p:tav>
+                                        <p:tav tm="100000">
+                                          <p:val>
+                                            <p:strVal val="#ppt_y"/>
+                                          </p:val>
+                                        </p:tav>
+                                      </p:tavLst>
+                                    </p:anim>
+                                  </p:childTnLst>
+                                </p:cTn>
+                              </p:par>
+                              <p:par>
+                                <p:cTn id="59" presetID="42" presetClass="entr" presetSubtype="0" fill="hold" grpId="0" nodeType="withEffect">
+                                  <p:stCondLst>
+                                    <p:cond delay="0"/>
+                                  </p:stCondLst>
+                                  <p:childTnLst>
+                                    <p:set>
+                                      <p:cBhvr>
+                                        <p:cTn id="60" dur="1" fill="hold">
+                                          <p:stCondLst>
+                                            <p:cond delay="0"/>
+                                          </p:stCondLst>
+                                        </p:cTn>
+                                        <p:tgtEl>
+                                          <p:spTgt spid="16"/>
+                                        </p:tgtEl>
+                                        <p:attrNameLst>
+                                          <p:attrName>style.visibility</p:attrName>
+                                        </p:attrNameLst>
+                                      </p:cBhvr>
+                                      <p:to>
+                                        <p:strVal val="visible"/>
+                                      </p:to>
+                                    </p:set>
+                                    <p:animEffect transition="in" filter="fade">
+                                      <p:cBhvr>
+                                        <p:cTn id="61" dur="1000"/>
+                                        <p:tgtEl>
+                                          <p:spTgt spid="16"/>
+                                        </p:tgtEl>
+                                      </p:cBhvr>
+                                    </p:animEffect>
+                                    <p:anim calcmode="lin" valueType="num">
+                                      <p:cBhvr>
+                                        <p:cTn id="62" dur="1000" fill="hold"/>
+                                        <p:tgtEl>
+                                          <p:spTgt spid="16"/>
+                                        </p:tgtEl>
+                                        <p:attrNameLst>
+                                          <p:attrName>ppt_x</p:attrName>
+                                        </p:attrNameLst>
+                                      </p:cBhvr>
+                                      <p:tavLst>
+                                        <p:tav tm="0">
+                                          <p:val>
+                                            <p:strVal val="#ppt_x"/>
+                                          </p:val>
+                                        </p:tav>
+                                        <p:tav tm="100000">
+                                          <p:val>
+                                            <p:strVal val="#ppt_x"/>
+                                          </p:val>
+                                        </p:tav>
+                                      </p:tavLst>
+                                    </p:anim>
+                                    <p:anim calcmode="lin" valueType="num">
+                                      <p:cBhvr>
+                                        <p:cTn id="63" dur="1000" fill="hold"/>
+                                        <p:tgtEl>
+                                          <p:spTgt spid="16"/>
+                                        </p:tgtEl>
+                                        <p:attrNameLst>
+                                          <p:attrName>ppt_y</p:attrName>
+                                        </p:attrNameLst>
+                                      </p:cBhvr>
+                                      <p:tavLst>
+                                        <p:tav tm="0">
+                                          <p:val>
+                                            <p:strVal val="#ppt_y+.1"/>
+                                          </p:val>
+                                        </p:tav>
+                                        <p:tav tm="100000">
+                                          <p:val>
+                                            <p:strVal val="#ppt_y"/>
+                                          </p:val>
+                                        </p:tav>
+                                      </p:tavLst>
+                                    </p:anim>
+                                  </p:childTnLst>
+                                </p:cTn>
+                              </p:par>
+                              <p:par>
+                                <p:cTn id="64" presetID="42" presetClass="entr" presetSubtype="0" fill="hold" grpId="0" nodeType="withEffect">
+                                  <p:stCondLst>
+                                    <p:cond delay="0"/>
+                                  </p:stCondLst>
+                                  <p:childTnLst>
+                                    <p:set>
+                                      <p:cBhvr>
+                                        <p:cTn id="65" dur="1" fill="hold">
+                                          <p:stCondLst>
+                                            <p:cond delay="0"/>
+                                          </p:stCondLst>
+                                        </p:cTn>
+                                        <p:tgtEl>
+                                          <p:spTgt spid="17"/>
+                                        </p:tgtEl>
+                                        <p:attrNameLst>
+                                          <p:attrName>style.visibility</p:attrName>
+                                        </p:attrNameLst>
+                                      </p:cBhvr>
+                                      <p:to>
+                                        <p:strVal val="visible"/>
+                                      </p:to>
+                                    </p:set>
+                                    <p:animEffect transition="in" filter="fade">
+                                      <p:cBhvr>
+                                        <p:cTn id="66" dur="1000"/>
+                                        <p:tgtEl>
+                                          <p:spTgt spid="17"/>
+                                        </p:tgtEl>
+                                      </p:cBhvr>
+                                    </p:animEffect>
+                                    <p:anim calcmode="lin" valueType="num">
+                                      <p:cBhvr>
+                                        <p:cTn id="67" dur="1000" fill="hold"/>
+                                        <p:tgtEl>
+                                          <p:spTgt spid="17"/>
+                                        </p:tgtEl>
+                                        <p:attrNameLst>
+                                          <p:attrName>ppt_x</p:attrName>
+                                        </p:attrNameLst>
+                                      </p:cBhvr>
+                                      <p:tavLst>
+                                        <p:tav tm="0">
+                                          <p:val>
+                                            <p:strVal val="#ppt_x"/>
+                                          </p:val>
+                                        </p:tav>
+                                        <p:tav tm="100000">
+                                          <p:val>
+                                            <p:strVal val="#ppt_x"/>
+                                          </p:val>
+                                        </p:tav>
+                                      </p:tavLst>
+                                    </p:anim>
+                                    <p:anim calcmode="lin" valueType="num">
+                                      <p:cBhvr>
+                                        <p:cTn id="68" dur="1000" fill="hold"/>
+                                        <p:tgtEl>
+                                          <p:spTgt spid="17"/>
+                                        </p:tgtEl>
+                                        <p:attrNameLst>
+                                          <p:attrName>ppt_y</p:attrName>
+                                        </p:attrNameLst>
+                                      </p:cBhvr>
+                                      <p:tavLst>
+                                        <p:tav tm="0">
+                                          <p:val>
+                                            <p:strVal val="#ppt_y+.1"/>
+                                          </p:val>
+                                        </p:tav>
+                                        <p:tav tm="100000">
+                                          <p:val>
+                                            <p:strVal val="#ppt_y"/>
+                                          </p:val>
+                                        </p:tav>
+                                      </p:tavLst>
+                                    </p:anim>
+                                  </p:childTnLst>
+                                </p:cTn>
+                              </p:par>
+                            </p:childTnLst>
+                          </p:cTn>
+                        </p:par>
+                      </p:childTnLst>
+                    </p:cTn>
+                  </p:par>
+                  <p:par>
+                    <p:cTn id="69" fill="hold">
+                      <p:stCondLst>
+                        <p:cond delay="indefinite"/>
+                      </p:stCondLst>
+                      <p:childTnLst>
+                        <p:par>
+                          <p:cTn id="70" fill="hold">
+                            <p:stCondLst>
+                              <p:cond delay="0"/>
+                            </p:stCondLst>
+                            <p:childTnLst>
+                              <p:par>
+                                <p:cTn id="71" presetID="42" presetClass="entr" presetSubtype="0" fill="hold" nodeType="clickEffect">
+                                  <p:stCondLst>
+                                    <p:cond delay="0"/>
+                                  </p:stCondLst>
+                                  <p:childTnLst>
+                                    <p:set>
+                                      <p:cBhvr>
+                                        <p:cTn id="72" dur="1" fill="hold">
+                                          <p:stCondLst>
+                                            <p:cond delay="0"/>
+                                          </p:stCondLst>
+                                        </p:cTn>
+                                        <p:tgtEl>
+                                          <p:spTgt spid="19"/>
+                                        </p:tgtEl>
+                                        <p:attrNameLst>
+                                          <p:attrName>style.visibility</p:attrName>
+                                        </p:attrNameLst>
+                                      </p:cBhvr>
+                                      <p:to>
+                                        <p:strVal val="visible"/>
+                                      </p:to>
+                                    </p:set>
+                                    <p:animEffect transition="in" filter="fade">
+                                      <p:cBhvr>
+                                        <p:cTn id="73" dur="1000"/>
+                                        <p:tgtEl>
+                                          <p:spTgt spid="19"/>
+                                        </p:tgtEl>
+                                      </p:cBhvr>
+                                    </p:animEffect>
+                                    <p:anim calcmode="lin" valueType="num">
+                                      <p:cBhvr>
+                                        <p:cTn id="74" dur="1000" fill="hold"/>
+                                        <p:tgtEl>
+                                          <p:spTgt spid="19"/>
+                                        </p:tgtEl>
+                                        <p:attrNameLst>
+                                          <p:attrName>ppt_x</p:attrName>
+                                        </p:attrNameLst>
+                                      </p:cBhvr>
+                                      <p:tavLst>
+                                        <p:tav tm="0">
+                                          <p:val>
+                                            <p:strVal val="#ppt_x"/>
+                                          </p:val>
+                                        </p:tav>
+                                        <p:tav tm="100000">
+                                          <p:val>
+                                            <p:strVal val="#ppt_x"/>
+                                          </p:val>
+                                        </p:tav>
+                                      </p:tavLst>
+                                    </p:anim>
+                                    <p:anim calcmode="lin" valueType="num">
+                                      <p:cBhvr>
+                                        <p:cTn id="75" dur="1000" fill="hold"/>
+                                        <p:tgtEl>
+                                          <p:spTgt spid="19"/>
+                                        </p:tgtEl>
+                                        <p:attrNameLst>
+                                          <p:attrName>ppt_y</p:attrName>
+                                        </p:attrNameLst>
+                                      </p:cBhvr>
+                                      <p:tavLst>
+                                        <p:tav tm="0">
+                                          <p:val>
+                                            <p:strVal val="#ppt_y+.1"/>
+                                          </p:val>
+                                        </p:tav>
+                                        <p:tav tm="100000">
+                                          <p:val>
+                                            <p:strVal val="#ppt_y"/>
+                                          </p:val>
+                                        </p:tav>
+                                      </p:tavLst>
+                                    </p:anim>
+                                  </p:childTnLst>
+                                </p:cTn>
+                              </p:par>
+                              <p:par>
+                                <p:cTn id="76" presetID="42" presetClass="entr" presetSubtype="0" fill="hold" nodeType="withEffect">
+                                  <p:stCondLst>
+                                    <p:cond delay="0"/>
+                                  </p:stCondLst>
+                                  <p:childTnLst>
+                                    <p:set>
+                                      <p:cBhvr>
+                                        <p:cTn id="77" dur="1" fill="hold">
+                                          <p:stCondLst>
+                                            <p:cond delay="0"/>
+                                          </p:stCondLst>
+                                        </p:cTn>
+                                        <p:tgtEl>
+                                          <p:spTgt spid="18"/>
+                                        </p:tgtEl>
+                                        <p:attrNameLst>
+                                          <p:attrName>style.visibility</p:attrName>
+                                        </p:attrNameLst>
+                                      </p:cBhvr>
+                                      <p:to>
+                                        <p:strVal val="visible"/>
+                                      </p:to>
+                                    </p:set>
+                                    <p:animEffect transition="in" filter="fade">
+                                      <p:cBhvr>
+                                        <p:cTn id="78" dur="1000"/>
+                                        <p:tgtEl>
+                                          <p:spTgt spid="18"/>
+                                        </p:tgtEl>
+                                      </p:cBhvr>
+                                    </p:animEffect>
+                                    <p:anim calcmode="lin" valueType="num">
+                                      <p:cBhvr>
+                                        <p:cTn id="79" dur="1000" fill="hold"/>
+                                        <p:tgtEl>
+                                          <p:spTgt spid="18"/>
+                                        </p:tgtEl>
+                                        <p:attrNameLst>
+                                          <p:attrName>ppt_x</p:attrName>
+                                        </p:attrNameLst>
+                                      </p:cBhvr>
+                                      <p:tavLst>
+                                        <p:tav tm="0">
+                                          <p:val>
+                                            <p:strVal val="#ppt_x"/>
+                                          </p:val>
+                                        </p:tav>
+                                        <p:tav tm="100000">
+                                          <p:val>
+                                            <p:strVal val="#ppt_x"/>
+                                          </p:val>
+                                        </p:tav>
+                                      </p:tavLst>
+                                    </p:anim>
+                                    <p:anim calcmode="lin" valueType="num">
+                                      <p:cBhvr>
+                                        <p:cTn id="80" dur="1000" fill="hold"/>
+                                        <p:tgtEl>
+                                          <p:spTgt spid="18"/>
+                                        </p:tgtEl>
+                                        <p:attrNameLst>
+                                          <p:attrName>ppt_y</p:attrName>
+                                        </p:attrNameLst>
+                                      </p:cBhvr>
+                                      <p:tavLst>
+                                        <p:tav tm="0">
+                                          <p:val>
+                                            <p:strVal val="#ppt_y+.1"/>
+                                          </p:val>
+                                        </p:tav>
+                                        <p:tav tm="100000">
+                                          <p:val>
+                                            <p:strVal val="#ppt_y"/>
+                                          </p:val>
+                                        </p:tav>
+                                      </p:tavLst>
+                                    </p:anim>
+                                  </p:childTnLst>
+                                </p:cTn>
+                              </p:par>
+                              <p:par>
+                                <p:cTn id="81" presetID="42" presetClass="entr" presetSubtype="0" fill="hold" grpId="0" nodeType="withEffect">
+                                  <p:stCondLst>
+                                    <p:cond delay="0"/>
+                                  </p:stCondLst>
+                                  <p:childTnLst>
+                                    <p:set>
+                                      <p:cBhvr>
+                                        <p:cTn id="82" dur="1" fill="hold">
+                                          <p:stCondLst>
+                                            <p:cond delay="0"/>
+                                          </p:stCondLst>
+                                        </p:cTn>
+                                        <p:tgtEl>
+                                          <p:spTgt spid="21"/>
+                                        </p:tgtEl>
+                                        <p:attrNameLst>
+                                          <p:attrName>style.visibility</p:attrName>
+                                        </p:attrNameLst>
+                                      </p:cBhvr>
+                                      <p:to>
+                                        <p:strVal val="visible"/>
+                                      </p:to>
+                                    </p:set>
+                                    <p:animEffect transition="in" filter="fade">
+                                      <p:cBhvr>
+                                        <p:cTn id="83" dur="1000"/>
+                                        <p:tgtEl>
+                                          <p:spTgt spid="21"/>
+                                        </p:tgtEl>
+                                      </p:cBhvr>
+                                    </p:animEffect>
+                                    <p:anim calcmode="lin" valueType="num">
+                                      <p:cBhvr>
+                                        <p:cTn id="84" dur="1000" fill="hold"/>
+                                        <p:tgtEl>
+                                          <p:spTgt spid="21"/>
+                                        </p:tgtEl>
+                                        <p:attrNameLst>
+                                          <p:attrName>ppt_x</p:attrName>
+                                        </p:attrNameLst>
+                                      </p:cBhvr>
+                                      <p:tavLst>
+                                        <p:tav tm="0">
+                                          <p:val>
+                                            <p:strVal val="#ppt_x"/>
+                                          </p:val>
+                                        </p:tav>
+                                        <p:tav tm="100000">
+                                          <p:val>
+                                            <p:strVal val="#ppt_x"/>
+                                          </p:val>
+                                        </p:tav>
+                                      </p:tavLst>
+                                    </p:anim>
+                                    <p:anim calcmode="lin" valueType="num">
+                                      <p:cBhvr>
+                                        <p:cTn id="85" dur="1000" fill="hold"/>
+                                        <p:tgtEl>
+                                          <p:spTgt spid="21"/>
+                                        </p:tgtEl>
+                                        <p:attrNameLst>
+                                          <p:attrName>ppt_y</p:attrName>
+                                        </p:attrNameLst>
+                                      </p:cBhvr>
+                                      <p:tavLst>
+                                        <p:tav tm="0">
+                                          <p:val>
+                                            <p:strVal val="#ppt_y+.1"/>
+                                          </p:val>
+                                        </p:tav>
+                                        <p:tav tm="100000">
+                                          <p:val>
+                                            <p:strVal val="#ppt_y"/>
+                                          </p:val>
+                                        </p:tav>
+                                      </p:tavLst>
+                                    </p:anim>
+                                  </p:childTnLst>
+                                </p:cTn>
+                              </p:par>
+                              <p:par>
+                                <p:cTn id="86" presetID="42" presetClass="entr" presetSubtype="0" fill="hold" grpId="0" nodeType="withEffect">
+                                  <p:stCondLst>
+                                    <p:cond delay="0"/>
+                                  </p:stCondLst>
+                                  <p:childTnLst>
+                                    <p:set>
+                                      <p:cBhvr>
+                                        <p:cTn id="87" dur="1" fill="hold">
+                                          <p:stCondLst>
+                                            <p:cond delay="0"/>
+                                          </p:stCondLst>
+                                        </p:cTn>
+                                        <p:tgtEl>
+                                          <p:spTgt spid="22"/>
+                                        </p:tgtEl>
+                                        <p:attrNameLst>
+                                          <p:attrName>style.visibility</p:attrName>
+                                        </p:attrNameLst>
+                                      </p:cBhvr>
+                                      <p:to>
+                                        <p:strVal val="visible"/>
+                                      </p:to>
+                                    </p:set>
+                                    <p:animEffect transition="in" filter="fade">
+                                      <p:cBhvr>
+                                        <p:cTn id="88" dur="1000"/>
+                                        <p:tgtEl>
+                                          <p:spTgt spid="22"/>
+                                        </p:tgtEl>
+                                      </p:cBhvr>
+                                    </p:animEffect>
+                                    <p:anim calcmode="lin" valueType="num">
+                                      <p:cBhvr>
+                                        <p:cTn id="89" dur="1000" fill="hold"/>
+                                        <p:tgtEl>
+                                          <p:spTgt spid="22"/>
+                                        </p:tgtEl>
+                                        <p:attrNameLst>
+                                          <p:attrName>ppt_x</p:attrName>
+                                        </p:attrNameLst>
+                                      </p:cBhvr>
+                                      <p:tavLst>
+                                        <p:tav tm="0">
+                                          <p:val>
+                                            <p:strVal val="#ppt_x"/>
+                                          </p:val>
+                                        </p:tav>
+                                        <p:tav tm="100000">
+                                          <p:val>
+                                            <p:strVal val="#ppt_x"/>
+                                          </p:val>
+                                        </p:tav>
+                                      </p:tavLst>
+                                    </p:anim>
+                                    <p:anim calcmode="lin" valueType="num">
+                                      <p:cBhvr>
+                                        <p:cTn id="90" dur="1000" fill="hold"/>
+                                        <p:tgtEl>
+                                          <p:spTgt spid="22"/>
+                                        </p:tgtEl>
+                                        <p:attrNameLst>
+                                          <p:attrName>ppt_y</p:attrName>
+                                        </p:attrNameLst>
+                                      </p:cBhvr>
+                                      <p:tavLst>
+                                        <p:tav tm="0">
+                                          <p:val>
+                                            <p:strVal val="#ppt_y+.1"/>
+                                          </p:val>
+                                        </p:tav>
+                                        <p:tav tm="100000">
+                                          <p:val>
+                                            <p:strVal val="#ppt_y"/>
+                                          </p:val>
+                                        </p:tav>
+                                      </p:tavLst>
+                                    </p:anim>
+                                  </p:childTnLst>
+                                </p:cTn>
+                              </p:par>
+                            </p:childTnLst>
+                          </p:cTn>
+                        </p:par>
+                      </p:childTnLst>
+                    </p:cTn>
+                  </p:par>
+                </p:childTnLst>
+              </p:cTn>
+              <p:prevCondLst>
+                <p:cond evt="onPrev" delay="0">
+                  <p:tgtEl>
+                    <p:sldTgt/>
+                  </p:tgtEl>
+                </p:cond>
+              </p:prevCondLst>
+              <p:nextCondLst>
+                <p:cond evt="onNext" delay="0">
+                  <p:tgtEl>
+                    <p:sldTgt/>
+                  </p:tgtEl>
+                </p:cond>
+              </p:nextCondLst>
+            </p:seq>
+          </p:childTnLst>
+        </p:cTn>
+      </p:par>
+    </p:tnLst>
+    <p:bldLst>
+      <p:bldP spid="5" grpId="0" animBg="1"/>
+      <p:bldP spid="6" grpId="0" animBg="1"/>
+      <p:bldP spid="7" grpId="0" animBg="1"/>
+      <p:bldP spid="11" grpId="0" animBg="1"/>
+      <p:bldP spid="12" grpId="0" animBg="1"/>
+      <p:bldP spid="15" grpId="0" animBg="1"/>
+      <p:bldP spid="16" grpId="0" animBg="1"/>
+      <p:bldP spid="17" grpId="0" animBg="1"/>
+      <p:bldP spid="21" grpId="0" animBg="1"/>
+      <p:bldP spid="22" grpId="0" animBg="1"/>
+    </p:bldLst>
+  </p:timing>
 </p:sld>
 </file>
 
@@ -4728,6 +5917,7 @@
         <a:solidFill>
           <a:srgbClr val="0A0A12"/>
         </a:solidFill>
+        <a:effectLst/>
       </p:bgPr>
     </p:bg>
     <p:spTree>
@@ -4765,11 +5955,11 @@
           <a:bodyPr wrap="square" lIns="0" tIns="0" rIns="0" bIns="0" rtlCol="0" anchor="ctr"/>
           <a:lstStyle/>
           <a:p>
-            <a:pPr indent="0" marL="0">
+            <a:pPr marL="0" indent="0">
               <a:buNone/>
             </a:pPr>
             <a:r>
-              <a:rPr lang="en-US" sz="6600" b="1" spc="-100" kern="0" dirty="0">
+              <a:rPr lang="en-US" sz="6600" b="1" kern="0" spc="-100" dirty="0">
                 <a:solidFill>
                   <a:srgbClr val="F2F2F7"/>
                 </a:solidFill>
@@ -4779,11 +5969,8 @@
               </a:rPr>
               <a:t>selly</a:t>
             </a:r>
-            <a:pPr indent="0" marL="0">
-              <a:buNone/>
-            </a:pPr>
-            <a:r>
-              <a:rPr lang="en-US" sz="6600" b="1" spc="-100" kern="0" dirty="0">
+            <a:r>
+              <a:rPr lang="en-US" sz="6600" b="1" kern="0" spc="-100" dirty="0">
                 <a:solidFill>
                   <a:srgbClr val="25D366"/>
                 </a:solidFill>
@@ -4818,7 +6005,7 @@
           <a:bodyPr wrap="square" lIns="0" tIns="0" rIns="0" bIns="0" rtlCol="0" anchor="ctr"/>
           <a:lstStyle/>
           <a:p>
-            <a:pPr indent="0" marL="0">
+            <a:pPr marL="0" indent="0">
               <a:buNone/>
             </a:pPr>
             <a:r>
@@ -4857,7 +6044,7 @@
           <a:bodyPr wrap="square" lIns="0" tIns="0" rIns="0" bIns="0" rtlCol="0" anchor="ctr"/>
           <a:lstStyle/>
           <a:p>
-            <a:pPr indent="0" marL="0">
+            <a:pPr marL="0" indent="0">
               <a:buNone/>
             </a:pPr>
             <a:r>
@@ -4896,7 +6083,7 @@
           <a:bodyPr wrap="square" lIns="0" tIns="0" rIns="0" bIns="0" rtlCol="0" anchor="ctr"/>
           <a:lstStyle/>
           <a:p>
-            <a:pPr indent="0" marL="0">
+            <a:pPr marL="0" indent="0">
               <a:buNone/>
             </a:pPr>
             <a:r>
@@ -4962,7 +6149,7 @@
           <a:bodyPr wrap="square" lIns="0" tIns="0" rIns="0" bIns="0" rtlCol="0" anchor="ctr"/>
           <a:lstStyle/>
           <a:p>
-            <a:pPr indent="0" marL="0">
+            <a:pPr marL="0" indent="0">
               <a:buNone/>
             </a:pPr>
             <a:r>
@@ -5028,7 +6215,7 @@
           <a:bodyPr wrap="square" lIns="0" tIns="0" rIns="0" bIns="0" rtlCol="0" anchor="ctr"/>
           <a:lstStyle/>
           <a:p>
-            <a:pPr indent="0" marL="0">
+            <a:pPr marL="0" indent="0">
               <a:buNone/>
             </a:pPr>
             <a:r>
@@ -5347,4 +6534,299 @@
     </a:ext>
   </a:extLst>
 </a:theme>
+</file>
+
+<file path=ppt/theme/theme2.xml><?xml version="1.0" encoding="utf-8"?>
+<a:theme xmlns:a="http://schemas.openxmlformats.org/drawingml/2006/main" name="Office Theme">
+  <a:themeElements>
+    <a:clrScheme name="Office">
+      <a:dk1>
+        <a:sysClr val="windowText" lastClr="000000"/>
+      </a:dk1>
+      <a:lt1>
+        <a:sysClr val="window" lastClr="FFFFFF"/>
+      </a:lt1>
+      <a:dk2>
+        <a:srgbClr val="44546A"/>
+      </a:dk2>
+      <a:lt2>
+        <a:srgbClr val="E7E6E6"/>
+      </a:lt2>
+      <a:accent1>
+        <a:srgbClr val="4472C4"/>
+      </a:accent1>
+      <a:accent2>
+        <a:srgbClr val="ED7D31"/>
+      </a:accent2>
+      <a:accent3>
+        <a:srgbClr val="A5A5A5"/>
+      </a:accent3>
+      <a:accent4>
+        <a:srgbClr val="FFC000"/>
+      </a:accent4>
+      <a:accent5>
+        <a:srgbClr val="5B9BD5"/>
+      </a:accent5>
+      <a:accent6>
+        <a:srgbClr val="70AD47"/>
+      </a:accent6>
+      <a:hlink>
+        <a:srgbClr val="0563C1"/>
+      </a:hlink>
+      <a:folHlink>
+        <a:srgbClr val="954F72"/>
+      </a:folHlink>
+    </a:clrScheme>
+    <a:fontScheme name="Office">
+      <a:majorFont>
+        <a:latin typeface="Calibri Light" panose="020F0302020204030204"/>
+        <a:ea typeface=""/>
+        <a:cs typeface=""/>
+        <a:font script="Jpan" typeface="游ゴシック Light"/>
+        <a:font script="Hang" typeface="맑은 고딕"/>
+        <a:font script="Hans" typeface="等线 Light"/>
+        <a:font script="Hant" typeface="新細明體"/>
+        <a:font script="Arab" typeface="Times New Roman"/>
+        <a:font script="Hebr" typeface="Times New Roman"/>
+        <a:font script="Thai" typeface="Angsana New"/>
+        <a:font script="Ethi" typeface="Nyala"/>
+        <a:font script="Beng" typeface="Vrinda"/>
+        <a:font script="Gujr" typeface="Shruti"/>
+        <a:font script="Khmr" typeface="MoolBoran"/>
+        <a:font script="Knda" typeface="Tunga"/>
+        <a:font script="Guru" typeface="Raavi"/>
+        <a:font script="Cans" typeface="Euphemia"/>
+        <a:font script="Cher" typeface="Plantagenet Cherokee"/>
+        <a:font script="Yiii" typeface="Microsoft Yi Baiti"/>
+        <a:font script="Tibt" typeface="Microsoft Himalaya"/>
+        <a:font script="Thaa" typeface="MV Boli"/>
+        <a:font script="Deva" typeface="Mangal"/>
+        <a:font script="Telu" typeface="Gautami"/>
+        <a:font script="Taml" typeface="Latha"/>
+        <a:font script="Syrc" typeface="Estrangelo Edessa"/>
+        <a:font script="Orya" typeface="Kalinga"/>
+        <a:font script="Mlym" typeface="Kartika"/>
+        <a:font script="Laoo" typeface="DokChampa"/>
+        <a:font script="Sinh" typeface="Iskoola Pota"/>
+        <a:font script="Mong" typeface="Mongolian Baiti"/>
+        <a:font script="Viet" typeface="Times New Roman"/>
+        <a:font script="Uigh" typeface="Microsoft Uighur"/>
+        <a:font script="Geor" typeface="Sylfaen"/>
+        <a:font script="Armn" typeface="Arial"/>
+        <a:font script="Bugi" typeface="Leelawadee UI"/>
+        <a:font script="Bopo" typeface="Microsoft JhengHei"/>
+        <a:font script="Java" typeface="Javanese Text"/>
+        <a:font script="Lisu" typeface="Segoe UI"/>
+        <a:font script="Mymr" typeface="Myanmar Text"/>
+        <a:font script="Nkoo" typeface="Ebrima"/>
+        <a:font script="Olck" typeface="Nirmala UI"/>
+        <a:font script="Osma" typeface="Ebrima"/>
+        <a:font script="Phag" typeface="Phagspa"/>
+        <a:font script="Syrn" typeface="Estrangelo Edessa"/>
+        <a:font script="Syrj" typeface="Estrangelo Edessa"/>
+        <a:font script="Syre" typeface="Estrangelo Edessa"/>
+        <a:font script="Sora" typeface="Nirmala UI"/>
+        <a:font script="Tale" typeface="Microsoft Tai Le"/>
+        <a:font script="Talu" typeface="Microsoft New Tai Lue"/>
+        <a:font script="Tfng" typeface="Ebrima"/>
+      </a:majorFont>
+      <a:minorFont>
+        <a:latin typeface="Calibri" panose="020F0502020204030204"/>
+        <a:ea typeface=""/>
+        <a:cs typeface=""/>
+        <a:font script="Jpan" typeface="游ゴシック"/>
+        <a:font script="Hang" typeface="맑은 고딕"/>
+        <a:font script="Hans" typeface="等线"/>
+        <a:font script="Hant" typeface="新細明體"/>
+        <a:font script="Arab" typeface="Arial"/>
+        <a:font script="Hebr" typeface="Arial"/>
+        <a:font script="Thai" typeface="Cordia New"/>
+        <a:font script="Ethi" typeface="Nyala"/>
+        <a:font script="Beng" typeface="Vrinda"/>
+        <a:font script="Gujr" typeface="Shruti"/>
+        <a:font script="Khmr" typeface="DaunPenh"/>
+        <a:font script="Knda" typeface="Tunga"/>
+        <a:font script="Guru" typeface="Raavi"/>
+        <a:font script="Cans" typeface="Euphemia"/>
+        <a:font script="Cher" typeface="Plantagenet Cherokee"/>
+        <a:font script="Yiii" typeface="Microsoft Yi Baiti"/>
+        <a:font script="Tibt" typeface="Microsoft Himalaya"/>
+        <a:font script="Thaa" typeface="MV Boli"/>
+        <a:font script="Deva" typeface="Mangal"/>
+        <a:font script="Telu" typeface="Gautami"/>
+        <a:font script="Taml" typeface="Latha"/>
+        <a:font script="Syrc" typeface="Estrangelo Edessa"/>
+        <a:font script="Orya" typeface="Kalinga"/>
+        <a:font script="Mlym" typeface="Kartika"/>
+        <a:font script="Laoo" typeface="DokChampa"/>
+        <a:font script="Sinh" typeface="Iskoola Pota"/>
+        <a:font script="Mong" typeface="Mongolian Baiti"/>
+        <a:font script="Viet" typeface="Arial"/>
+        <a:font script="Uigh" typeface="Microsoft Uighur"/>
+        <a:font script="Geor" typeface="Sylfaen"/>
+        <a:font script="Armn" typeface="Arial"/>
+        <a:font script="Bugi" typeface="Leelawadee UI"/>
+        <a:font script="Bopo" typeface="Microsoft JhengHei"/>
+        <a:font script="Java" typeface="Javanese Text"/>
+        <a:font script="Lisu" typeface="Segoe UI"/>
+        <a:font script="Mymr" typeface="Myanmar Text"/>
+        <a:font script="Nkoo" typeface="Ebrima"/>
+        <a:font script="Olck" typeface="Nirmala UI"/>
+        <a:font script="Osma" typeface="Ebrima"/>
+        <a:font script="Phag" typeface="Phagspa"/>
+        <a:font script="Syrn" typeface="Estrangelo Edessa"/>
+        <a:font script="Syrj" typeface="Estrangelo Edessa"/>
+        <a:font script="Syre" typeface="Estrangelo Edessa"/>
+        <a:font script="Sora" typeface="Nirmala UI"/>
+        <a:font script="Tale" typeface="Microsoft Tai Le"/>
+        <a:font script="Talu" typeface="Microsoft New Tai Lue"/>
+        <a:font script="Tfng" typeface="Ebrima"/>
+      </a:minorFont>
+    </a:fontScheme>
+    <a:fmtScheme name="Office">
+      <a:fillStyleLst>
+        <a:solidFill>
+          <a:schemeClr val="phClr"/>
+        </a:solidFill>
+        <a:gradFill rotWithShape="1">
+          <a:gsLst>
+            <a:gs pos="0">
+              <a:schemeClr val="phClr">
+                <a:lumMod val="110000"/>
+                <a:satMod val="105000"/>
+                <a:tint val="67000"/>
+              </a:schemeClr>
+            </a:gs>
+            <a:gs pos="50000">
+              <a:schemeClr val="phClr">
+                <a:lumMod val="105000"/>
+                <a:satMod val="103000"/>
+                <a:tint val="73000"/>
+              </a:schemeClr>
+            </a:gs>
+            <a:gs pos="100000">
+              <a:schemeClr val="phClr">
+                <a:lumMod val="105000"/>
+                <a:satMod val="109000"/>
+                <a:tint val="81000"/>
+              </a:schemeClr>
+            </a:gs>
+          </a:gsLst>
+          <a:lin ang="5400000" scaled="0"/>
+        </a:gradFill>
+        <a:gradFill rotWithShape="1">
+          <a:gsLst>
+            <a:gs pos="0">
+              <a:schemeClr val="phClr">
+                <a:satMod val="103000"/>
+                <a:lumMod val="102000"/>
+                <a:tint val="94000"/>
+              </a:schemeClr>
+            </a:gs>
+            <a:gs pos="50000">
+              <a:schemeClr val="phClr">
+                <a:satMod val="110000"/>
+                <a:lumMod val="100000"/>
+                <a:shade val="100000"/>
+              </a:schemeClr>
+            </a:gs>
+            <a:gs pos="100000">
+              <a:schemeClr val="phClr">
+                <a:lumMod val="99000"/>
+                <a:satMod val="120000"/>
+                <a:shade val="78000"/>
+              </a:schemeClr>
+            </a:gs>
+          </a:gsLst>
+          <a:lin ang="5400000" scaled="0"/>
+        </a:gradFill>
+      </a:fillStyleLst>
+      <a:lnStyleLst>
+        <a:ln w="6350" cap="flat" cmpd="sng" algn="ctr">
+          <a:solidFill>
+            <a:schemeClr val="phClr"/>
+          </a:solidFill>
+          <a:prstDash val="solid"/>
+          <a:miter lim="800000"/>
+        </a:ln>
+        <a:ln w="12700" cap="flat" cmpd="sng" algn="ctr">
+          <a:solidFill>
+            <a:schemeClr val="phClr"/>
+          </a:solidFill>
+          <a:prstDash val="solid"/>
+          <a:miter lim="800000"/>
+        </a:ln>
+        <a:ln w="19050" cap="flat" cmpd="sng" algn="ctr">
+          <a:solidFill>
+            <a:schemeClr val="phClr"/>
+          </a:solidFill>
+          <a:prstDash val="solid"/>
+          <a:miter lim="800000"/>
+        </a:ln>
+      </a:lnStyleLst>
+      <a:effectStyleLst>
+        <a:effectStyle>
+          <a:effectLst/>
+        </a:effectStyle>
+        <a:effectStyle>
+          <a:effectLst/>
+        </a:effectStyle>
+        <a:effectStyle>
+          <a:effectLst>
+            <a:outerShdw blurRad="57150" dist="19050" dir="5400000" algn="ctr" rotWithShape="0">
+              <a:srgbClr val="000000">
+                <a:alpha val="63000"/>
+              </a:srgbClr>
+            </a:outerShdw>
+          </a:effectLst>
+        </a:effectStyle>
+      </a:effectStyleLst>
+      <a:bgFillStyleLst>
+        <a:solidFill>
+          <a:schemeClr val="phClr"/>
+        </a:solidFill>
+        <a:solidFill>
+          <a:schemeClr val="phClr">
+            <a:tint val="95000"/>
+            <a:satMod val="170000"/>
+          </a:schemeClr>
+        </a:solidFill>
+        <a:gradFill rotWithShape="1">
+          <a:gsLst>
+            <a:gs pos="0">
+              <a:schemeClr val="phClr">
+                <a:tint val="93000"/>
+                <a:satMod val="150000"/>
+                <a:shade val="98000"/>
+                <a:lumMod val="102000"/>
+              </a:schemeClr>
+            </a:gs>
+            <a:gs pos="50000">
+              <a:schemeClr val="phClr">
+                <a:tint val="98000"/>
+                <a:satMod val="130000"/>
+                <a:shade val="90000"/>
+                <a:lumMod val="103000"/>
+              </a:schemeClr>
+            </a:gs>
+            <a:gs pos="100000">
+              <a:schemeClr val="phClr">
+                <a:shade val="63000"/>
+                <a:satMod val="120000"/>
+              </a:schemeClr>
+            </a:gs>
+          </a:gsLst>
+          <a:lin ang="5400000" scaled="0"/>
+        </a:gradFill>
+      </a:bgFillStyleLst>
+    </a:fmtScheme>
+  </a:themeElements>
+  <a:objectDefaults/>
+  <a:extraClrSchemeLst/>
+  <a:extLst>
+    <a:ext uri="{05A4C25C-085E-4340-85A3-A5531E510DB2}">
+      <thm15:themeFamily xmlns:thm15="http://schemas.microsoft.com/office/thememl/2012/main" name="Office Theme" id="{62F939B6-93AF-4DB8-9C6B-D6C7DFDC589F}" vid="{4A3C46E8-61CC-4603-A589-7422A47A8E4A}"/>
+    </a:ext>
+  </a:extLst>
+</a:theme>
 </file>